--- a/Презентация.pptx
+++ b/Презентация.pptx
@@ -4,10 +4,23 @@
   <p:sldMasterIdLst>
     <p:sldMasterId id="2147483648" r:id="rId1"/>
   </p:sldMasterIdLst>
+  <p:notesMasterIdLst>
+    <p:notesMasterId r:id="rId15"/>
+  </p:notesMasterIdLst>
   <p:sldIdLst>
     <p:sldId id="256" r:id="rId2"/>
     <p:sldId id="257" r:id="rId3"/>
     <p:sldId id="258" r:id="rId4"/>
+    <p:sldId id="259" r:id="rId5"/>
+    <p:sldId id="260" r:id="rId6"/>
+    <p:sldId id="261" r:id="rId7"/>
+    <p:sldId id="262" r:id="rId8"/>
+    <p:sldId id="263" r:id="rId9"/>
+    <p:sldId id="264" r:id="rId10"/>
+    <p:sldId id="265" r:id="rId11"/>
+    <p:sldId id="267" r:id="rId12"/>
+    <p:sldId id="266" r:id="rId13"/>
+    <p:sldId id="268" r:id="rId14"/>
   </p:sldIdLst>
   <p:sldSz cx="12192000" cy="6858000"/>
   <p:notesSz cx="6858000" cy="9144000"/>
@@ -106,7 +119,361 @@
       </a:defRPr>
     </a:lvl9pPr>
   </p:defaultTextStyle>
+  <p:extLst>
+    <p:ext uri="{EFAFB233-063F-42B5-8137-9DF3F51BA10A}">
+      <p15:sldGuideLst xmlns:p15="http://schemas.microsoft.com/office/powerpoint/2012/main"/>
+    </p:ext>
+  </p:extLst>
 </p:presentation>
+</file>
+
+<file path=ppt/notesMasters/notesMaster1.xml><?xml version="1.0" encoding="utf-8"?>
+<p:notesMaster xmlns:a="http://schemas.openxmlformats.org/drawingml/2006/main" xmlns:r="http://schemas.openxmlformats.org/officeDocument/2006/relationships" xmlns:p="http://schemas.openxmlformats.org/presentationml/2006/main">
+  <p:cSld>
+    <p:bg>
+      <p:bgRef idx="1001">
+        <a:schemeClr val="bg1"/>
+      </p:bgRef>
+    </p:bg>
+    <p:spTree>
+      <p:nvGrpSpPr>
+        <p:cNvPr id="1" name=""/>
+        <p:cNvGrpSpPr/>
+        <p:nvPr/>
+      </p:nvGrpSpPr>
+      <p:grpSpPr>
+        <a:xfrm>
+          <a:off x="0" y="0"/>
+          <a:ext cx="0" cy="0"/>
+          <a:chOff x="0" y="0"/>
+          <a:chExt cx="0" cy="0"/>
+        </a:xfrm>
+      </p:grpSpPr>
+      <p:sp>
+        <p:nvSpPr>
+          <p:cNvPr id="2" name="Верхний колонтитул 1"/>
+          <p:cNvSpPr>
+            <a:spLocks noGrp="1"/>
+          </p:cNvSpPr>
+          <p:nvPr>
+            <p:ph type="hdr" sz="quarter"/>
+          </p:nvPr>
+        </p:nvSpPr>
+        <p:spPr>
+          <a:xfrm>
+            <a:off x="0" y="0"/>
+            <a:ext cx="2971800" cy="458788"/>
+          </a:xfrm>
+          <a:prstGeom prst="rect">
+            <a:avLst/>
+          </a:prstGeom>
+        </p:spPr>
+        <p:txBody>
+          <a:bodyPr vert="horz" lIns="91440" tIns="45720" rIns="91440" bIns="45720" rtlCol="0"/>
+          <a:lstStyle>
+            <a:lvl1pPr algn="l">
+              <a:defRPr sz="1200"/>
+            </a:lvl1pPr>
+          </a:lstStyle>
+          <a:p>
+            <a:endParaRPr lang="ru-RU"/>
+          </a:p>
+        </p:txBody>
+      </p:sp>
+      <p:sp>
+        <p:nvSpPr>
+          <p:cNvPr id="3" name="Дата 2"/>
+          <p:cNvSpPr>
+            <a:spLocks noGrp="1"/>
+          </p:cNvSpPr>
+          <p:nvPr>
+            <p:ph type="dt" idx="1"/>
+          </p:nvPr>
+        </p:nvSpPr>
+        <p:spPr>
+          <a:xfrm>
+            <a:off x="3884613" y="0"/>
+            <a:ext cx="2971800" cy="458788"/>
+          </a:xfrm>
+          <a:prstGeom prst="rect">
+            <a:avLst/>
+          </a:prstGeom>
+        </p:spPr>
+        <p:txBody>
+          <a:bodyPr vert="horz" lIns="91440" tIns="45720" rIns="91440" bIns="45720" rtlCol="0"/>
+          <a:lstStyle>
+            <a:lvl1pPr algn="r">
+              <a:defRPr sz="1200"/>
+            </a:lvl1pPr>
+          </a:lstStyle>
+          <a:p>
+            <a:fld id="{6878DDC8-3161-47FD-8550-906B82F92B8F}" type="datetimeFigureOut">
+              <a:rPr lang="ru-RU" smtClean="0"/>
+              <a:t>14.05.2026</a:t>
+            </a:fld>
+            <a:endParaRPr lang="ru-RU"/>
+          </a:p>
+        </p:txBody>
+      </p:sp>
+      <p:sp>
+        <p:nvSpPr>
+          <p:cNvPr id="4" name="Образ слайда 3"/>
+          <p:cNvSpPr>
+            <a:spLocks noGrp="1" noRot="1" noChangeAspect="1"/>
+          </p:cNvSpPr>
+          <p:nvPr>
+            <p:ph type="sldImg" idx="2"/>
+          </p:nvPr>
+        </p:nvSpPr>
+        <p:spPr>
+          <a:xfrm>
+            <a:off x="685800" y="1143000"/>
+            <a:ext cx="5486400" cy="3086100"/>
+          </a:xfrm>
+          <a:prstGeom prst="rect">
+            <a:avLst/>
+          </a:prstGeom>
+          <a:noFill/>
+          <a:ln w="12700">
+            <a:solidFill>
+              <a:prstClr val="black"/>
+            </a:solidFill>
+          </a:ln>
+        </p:spPr>
+        <p:txBody>
+          <a:bodyPr vert="horz" lIns="91440" tIns="45720" rIns="91440" bIns="45720" rtlCol="0" anchor="ctr"/>
+          <a:lstStyle/>
+          <a:p>
+            <a:endParaRPr lang="ru-RU"/>
+          </a:p>
+        </p:txBody>
+      </p:sp>
+      <p:sp>
+        <p:nvSpPr>
+          <p:cNvPr id="5" name="Заметки 4"/>
+          <p:cNvSpPr>
+            <a:spLocks noGrp="1"/>
+          </p:cNvSpPr>
+          <p:nvPr>
+            <p:ph type="body" sz="quarter" idx="3"/>
+          </p:nvPr>
+        </p:nvSpPr>
+        <p:spPr>
+          <a:xfrm>
+            <a:off x="685800" y="4400550"/>
+            <a:ext cx="5486400" cy="3600450"/>
+          </a:xfrm>
+          <a:prstGeom prst="rect">
+            <a:avLst/>
+          </a:prstGeom>
+        </p:spPr>
+        <p:txBody>
+          <a:bodyPr vert="horz" lIns="91440" tIns="45720" rIns="91440" bIns="45720" rtlCol="0"/>
+          <a:lstStyle/>
+          <a:p>
+            <a:pPr lvl="0"/>
+            <a:r>
+              <a:rPr lang="ru-RU"/>
+              <a:t>Образец текста</a:t>
+            </a:r>
+          </a:p>
+          <a:p>
+            <a:pPr lvl="1"/>
+            <a:r>
+              <a:rPr lang="ru-RU"/>
+              <a:t>Второй уровень</a:t>
+            </a:r>
+          </a:p>
+          <a:p>
+            <a:pPr lvl="2"/>
+            <a:r>
+              <a:rPr lang="ru-RU"/>
+              <a:t>Третий уровень</a:t>
+            </a:r>
+          </a:p>
+          <a:p>
+            <a:pPr lvl="3"/>
+            <a:r>
+              <a:rPr lang="ru-RU"/>
+              <a:t>Четвертый уровень</a:t>
+            </a:r>
+          </a:p>
+          <a:p>
+            <a:pPr lvl="4"/>
+            <a:r>
+              <a:rPr lang="ru-RU"/>
+              <a:t>Пятый уровень</a:t>
+            </a:r>
+          </a:p>
+        </p:txBody>
+      </p:sp>
+      <p:sp>
+        <p:nvSpPr>
+          <p:cNvPr id="6" name="Нижний колонтитул 5"/>
+          <p:cNvSpPr>
+            <a:spLocks noGrp="1"/>
+          </p:cNvSpPr>
+          <p:nvPr>
+            <p:ph type="ftr" sz="quarter" idx="4"/>
+          </p:nvPr>
+        </p:nvSpPr>
+        <p:spPr>
+          <a:xfrm>
+            <a:off x="0" y="8685213"/>
+            <a:ext cx="2971800" cy="458787"/>
+          </a:xfrm>
+          <a:prstGeom prst="rect">
+            <a:avLst/>
+          </a:prstGeom>
+        </p:spPr>
+        <p:txBody>
+          <a:bodyPr vert="horz" lIns="91440" tIns="45720" rIns="91440" bIns="45720" rtlCol="0" anchor="b"/>
+          <a:lstStyle>
+            <a:lvl1pPr algn="l">
+              <a:defRPr sz="1200"/>
+            </a:lvl1pPr>
+          </a:lstStyle>
+          <a:p>
+            <a:endParaRPr lang="ru-RU"/>
+          </a:p>
+        </p:txBody>
+      </p:sp>
+      <p:sp>
+        <p:nvSpPr>
+          <p:cNvPr id="7" name="Номер слайда 6"/>
+          <p:cNvSpPr>
+            <a:spLocks noGrp="1"/>
+          </p:cNvSpPr>
+          <p:nvPr>
+            <p:ph type="sldNum" sz="quarter" idx="5"/>
+          </p:nvPr>
+        </p:nvSpPr>
+        <p:spPr>
+          <a:xfrm>
+            <a:off x="3884613" y="8685213"/>
+            <a:ext cx="2971800" cy="458787"/>
+          </a:xfrm>
+          <a:prstGeom prst="rect">
+            <a:avLst/>
+          </a:prstGeom>
+        </p:spPr>
+        <p:txBody>
+          <a:bodyPr vert="horz" lIns="91440" tIns="45720" rIns="91440" bIns="45720" rtlCol="0" anchor="b"/>
+          <a:lstStyle>
+            <a:lvl1pPr algn="r">
+              <a:defRPr sz="1200"/>
+            </a:lvl1pPr>
+          </a:lstStyle>
+          <a:p>
+            <a:fld id="{F5886749-259E-4E18-B2E4-8398011C32DB}" type="slidenum">
+              <a:rPr lang="ru-RU" smtClean="0"/>
+              <a:t>‹#›</a:t>
+            </a:fld>
+            <a:endParaRPr lang="ru-RU"/>
+          </a:p>
+        </p:txBody>
+      </p:sp>
+    </p:spTree>
+    <p:extLst>
+      <p:ext uri="{BB962C8B-B14F-4D97-AF65-F5344CB8AC3E}">
+        <p14:creationId xmlns:p14="http://schemas.microsoft.com/office/powerpoint/2010/main" val="735444829"/>
+      </p:ext>
+    </p:extLst>
+  </p:cSld>
+  <p:clrMap bg1="lt1" tx1="dk1" bg2="lt2" tx2="dk2" accent1="accent1" accent2="accent2" accent3="accent3" accent4="accent4" accent5="accent5" accent6="accent6" hlink="hlink" folHlink="folHlink"/>
+  <p:notesStyle>
+    <a:lvl1pPr marL="0" algn="l" defTabSz="914400" rtl="0" eaLnBrk="1" latinLnBrk="0" hangingPunct="1">
+      <a:defRPr sz="1200" kern="1200">
+        <a:solidFill>
+          <a:schemeClr val="tx1"/>
+        </a:solidFill>
+        <a:latin typeface="+mn-lt"/>
+        <a:ea typeface="+mn-ea"/>
+        <a:cs typeface="+mn-cs"/>
+      </a:defRPr>
+    </a:lvl1pPr>
+    <a:lvl2pPr marL="457200" algn="l" defTabSz="914400" rtl="0" eaLnBrk="1" latinLnBrk="0" hangingPunct="1">
+      <a:defRPr sz="1200" kern="1200">
+        <a:solidFill>
+          <a:schemeClr val="tx1"/>
+        </a:solidFill>
+        <a:latin typeface="+mn-lt"/>
+        <a:ea typeface="+mn-ea"/>
+        <a:cs typeface="+mn-cs"/>
+      </a:defRPr>
+    </a:lvl2pPr>
+    <a:lvl3pPr marL="914400" algn="l" defTabSz="914400" rtl="0" eaLnBrk="1" latinLnBrk="0" hangingPunct="1">
+      <a:defRPr sz="1200" kern="1200">
+        <a:solidFill>
+          <a:schemeClr val="tx1"/>
+        </a:solidFill>
+        <a:latin typeface="+mn-lt"/>
+        <a:ea typeface="+mn-ea"/>
+        <a:cs typeface="+mn-cs"/>
+      </a:defRPr>
+    </a:lvl3pPr>
+    <a:lvl4pPr marL="1371600" algn="l" defTabSz="914400" rtl="0" eaLnBrk="1" latinLnBrk="0" hangingPunct="1">
+      <a:defRPr sz="1200" kern="1200">
+        <a:solidFill>
+          <a:schemeClr val="tx1"/>
+        </a:solidFill>
+        <a:latin typeface="+mn-lt"/>
+        <a:ea typeface="+mn-ea"/>
+        <a:cs typeface="+mn-cs"/>
+      </a:defRPr>
+    </a:lvl4pPr>
+    <a:lvl5pPr marL="1828800" algn="l" defTabSz="914400" rtl="0" eaLnBrk="1" latinLnBrk="0" hangingPunct="1">
+      <a:defRPr sz="1200" kern="1200">
+        <a:solidFill>
+          <a:schemeClr val="tx1"/>
+        </a:solidFill>
+        <a:latin typeface="+mn-lt"/>
+        <a:ea typeface="+mn-ea"/>
+        <a:cs typeface="+mn-cs"/>
+      </a:defRPr>
+    </a:lvl5pPr>
+    <a:lvl6pPr marL="2286000" algn="l" defTabSz="914400" rtl="0" eaLnBrk="1" latinLnBrk="0" hangingPunct="1">
+      <a:defRPr sz="1200" kern="1200">
+        <a:solidFill>
+          <a:schemeClr val="tx1"/>
+        </a:solidFill>
+        <a:latin typeface="+mn-lt"/>
+        <a:ea typeface="+mn-ea"/>
+        <a:cs typeface="+mn-cs"/>
+      </a:defRPr>
+    </a:lvl6pPr>
+    <a:lvl7pPr marL="2743200" algn="l" defTabSz="914400" rtl="0" eaLnBrk="1" latinLnBrk="0" hangingPunct="1">
+      <a:defRPr sz="1200" kern="1200">
+        <a:solidFill>
+          <a:schemeClr val="tx1"/>
+        </a:solidFill>
+        <a:latin typeface="+mn-lt"/>
+        <a:ea typeface="+mn-ea"/>
+        <a:cs typeface="+mn-cs"/>
+      </a:defRPr>
+    </a:lvl7pPr>
+    <a:lvl8pPr marL="3200400" algn="l" defTabSz="914400" rtl="0" eaLnBrk="1" latinLnBrk="0" hangingPunct="1">
+      <a:defRPr sz="1200" kern="1200">
+        <a:solidFill>
+          <a:schemeClr val="tx1"/>
+        </a:solidFill>
+        <a:latin typeface="+mn-lt"/>
+        <a:ea typeface="+mn-ea"/>
+        <a:cs typeface="+mn-cs"/>
+      </a:defRPr>
+    </a:lvl8pPr>
+    <a:lvl9pPr marL="3657600" algn="l" defTabSz="914400" rtl="0" eaLnBrk="1" latinLnBrk="0" hangingPunct="1">
+      <a:defRPr sz="1200" kern="1200">
+        <a:solidFill>
+          <a:schemeClr val="tx1"/>
+        </a:solidFill>
+        <a:latin typeface="+mn-lt"/>
+        <a:ea typeface="+mn-ea"/>
+        <a:cs typeface="+mn-cs"/>
+      </a:defRPr>
+    </a:lvl9pPr>
+  </p:notesStyle>
+</p:notesMaster>
 </file>
 
 <file path=ppt/slideLayouts/slideLayout1.xml><?xml version="1.0" encoding="utf-8"?>
@@ -3582,6 +3949,957 @@
 </p:sld>
 </file>
 
+<file path=ppt/slides/slide10.xml><?xml version="1.0" encoding="utf-8"?>
+<p:sld xmlns:a="http://schemas.openxmlformats.org/drawingml/2006/main" xmlns:r="http://schemas.openxmlformats.org/officeDocument/2006/relationships" xmlns:p="http://schemas.openxmlformats.org/presentationml/2006/main">
+  <p:cSld>
+    <p:spTree>
+      <p:nvGrpSpPr>
+        <p:cNvPr id="1" name=""/>
+        <p:cNvGrpSpPr/>
+        <p:nvPr/>
+      </p:nvGrpSpPr>
+      <p:grpSpPr>
+        <a:xfrm>
+          <a:off x="0" y="0"/>
+          <a:ext cx="0" cy="0"/>
+          <a:chOff x="0" y="0"/>
+          <a:chExt cx="0" cy="0"/>
+        </a:xfrm>
+      </p:grpSpPr>
+      <p:sp>
+        <p:nvSpPr>
+          <p:cNvPr id="2" name="Заголовок 1">
+            <a:extLst>
+              <a:ext uri="{FF2B5EF4-FFF2-40B4-BE49-F238E27FC236}">
+                <a16:creationId xmlns:a16="http://schemas.microsoft.com/office/drawing/2014/main" id="{B8BF5641-8E16-4220-BABE-249F5274F6CA}"/>
+              </a:ext>
+            </a:extLst>
+          </p:cNvPr>
+          <p:cNvSpPr>
+            <a:spLocks noGrp="1"/>
+          </p:cNvSpPr>
+          <p:nvPr>
+            <p:ph type="title"/>
+          </p:nvPr>
+        </p:nvSpPr>
+        <p:spPr>
+          <a:xfrm>
+            <a:off x="787109" y="234892"/>
+            <a:ext cx="10515600" cy="939567"/>
+          </a:xfrm>
+        </p:spPr>
+        <p:txBody>
+          <a:bodyPr/>
+          <a:lstStyle/>
+          <a:p>
+            <a:r>
+              <a:rPr lang="ru-RU" dirty="0">
+                <a:latin typeface="Times New Roman" panose="02020603050405020304" pitchFamily="18" charset="0"/>
+                <a:cs typeface="Times New Roman" panose="02020603050405020304" pitchFamily="18" charset="0"/>
+              </a:rPr>
+              <a:t>Разработка веб-приложения</a:t>
+            </a:r>
+          </a:p>
+        </p:txBody>
+      </p:sp>
+      <p:sp>
+        <p:nvSpPr>
+          <p:cNvPr id="3" name="Текст 2">
+            <a:extLst>
+              <a:ext uri="{FF2B5EF4-FFF2-40B4-BE49-F238E27FC236}">
+                <a16:creationId xmlns:a16="http://schemas.microsoft.com/office/drawing/2014/main" id="{B9FC10D3-6877-4C4E-9C5E-3A603695325D}"/>
+              </a:ext>
+            </a:extLst>
+          </p:cNvPr>
+          <p:cNvSpPr>
+            <a:spLocks noGrp="1"/>
+          </p:cNvSpPr>
+          <p:nvPr>
+            <p:ph type="body" idx="1"/>
+          </p:nvPr>
+        </p:nvSpPr>
+        <p:spPr/>
+        <p:txBody>
+          <a:bodyPr>
+            <a:normAutofit/>
+          </a:bodyPr>
+          <a:lstStyle/>
+          <a:p>
+            <a:r>
+              <a:rPr lang="ru-RU" sz="1000" dirty="0">
+                <a:solidFill>
+                  <a:schemeClr val="bg1"/>
+                </a:solidFill>
+              </a:rPr>
+              <a:t>.</a:t>
+            </a:r>
+          </a:p>
+        </p:txBody>
+      </p:sp>
+      <p:pic>
+        <p:nvPicPr>
+          <p:cNvPr id="4" name="Рисунок 3">
+            <a:extLst>
+              <a:ext uri="{FF2B5EF4-FFF2-40B4-BE49-F238E27FC236}">
+                <a16:creationId xmlns:a16="http://schemas.microsoft.com/office/drawing/2014/main" id="{204AA62C-3CF2-4CCF-8E61-073968B80DDA}"/>
+              </a:ext>
+            </a:extLst>
+          </p:cNvPr>
+          <p:cNvPicPr>
+            <a:picLocks noChangeAspect="1"/>
+          </p:cNvPicPr>
+          <p:nvPr/>
+        </p:nvPicPr>
+        <p:blipFill rotWithShape="1">
+          <a:blip r:embed="rId2"/>
+          <a:srcRect l="12248" t="20184" r="55757" b="28440"/>
+          <a:stretch/>
+        </p:blipFill>
+        <p:spPr>
+          <a:xfrm>
+            <a:off x="679507" y="1409687"/>
+            <a:ext cx="4798503" cy="4334133"/>
+          </a:xfrm>
+          <a:prstGeom prst="rect">
+            <a:avLst/>
+          </a:prstGeom>
+        </p:spPr>
+      </p:pic>
+      <p:pic>
+        <p:nvPicPr>
+          <p:cNvPr id="6" name="Рисунок 5">
+            <a:extLst>
+              <a:ext uri="{FF2B5EF4-FFF2-40B4-BE49-F238E27FC236}">
+                <a16:creationId xmlns:a16="http://schemas.microsoft.com/office/drawing/2014/main" id="{655652EA-8542-479B-B13E-F09232962FBA}"/>
+              </a:ext>
+            </a:extLst>
+          </p:cNvPr>
+          <p:cNvPicPr>
+            <a:picLocks noChangeAspect="1"/>
+          </p:cNvPicPr>
+          <p:nvPr/>
+        </p:nvPicPr>
+        <p:blipFill rotWithShape="1">
+          <a:blip r:embed="rId3"/>
+          <a:srcRect l="12110" t="17125" r="43302" b="8013"/>
+          <a:stretch/>
+        </p:blipFill>
+        <p:spPr>
+          <a:xfrm>
+            <a:off x="5914239" y="1174459"/>
+            <a:ext cx="5889072" cy="5561902"/>
+          </a:xfrm>
+          <a:prstGeom prst="rect">
+            <a:avLst/>
+          </a:prstGeom>
+        </p:spPr>
+      </p:pic>
+      <p:sp>
+        <p:nvSpPr>
+          <p:cNvPr id="7" name="TextBox 6">
+            <a:extLst>
+              <a:ext uri="{FF2B5EF4-FFF2-40B4-BE49-F238E27FC236}">
+                <a16:creationId xmlns:a16="http://schemas.microsoft.com/office/drawing/2014/main" id="{E74124D5-53FF-476E-B195-74BD19D0AF41}"/>
+              </a:ext>
+            </a:extLst>
+          </p:cNvPr>
+          <p:cNvSpPr txBox="1"/>
+          <p:nvPr/>
+        </p:nvSpPr>
+        <p:spPr>
+          <a:xfrm>
+            <a:off x="1476376" y="5743820"/>
+            <a:ext cx="3144906" cy="369332"/>
+          </a:xfrm>
+          <a:prstGeom prst="rect">
+            <a:avLst/>
+          </a:prstGeom>
+          <a:noFill/>
+        </p:spPr>
+        <p:txBody>
+          <a:bodyPr wrap="square" rtlCol="0">
+            <a:spAutoFit/>
+          </a:bodyPr>
+          <a:lstStyle/>
+          <a:p>
+            <a:r>
+              <a:rPr lang="ru-RU" dirty="0">
+                <a:latin typeface="Times New Roman" panose="02020603050405020304" pitchFamily="18" charset="0"/>
+                <a:cs typeface="Times New Roman" panose="02020603050405020304" pitchFamily="18" charset="0"/>
+              </a:rPr>
+              <a:t>Код обработки формы</a:t>
+            </a:r>
+          </a:p>
+        </p:txBody>
+      </p:sp>
+      <p:sp>
+        <p:nvSpPr>
+          <p:cNvPr id="8" name="TextBox 7">
+            <a:extLst>
+              <a:ext uri="{FF2B5EF4-FFF2-40B4-BE49-F238E27FC236}">
+                <a16:creationId xmlns:a16="http://schemas.microsoft.com/office/drawing/2014/main" id="{D8363C82-C08F-4763-9A33-39A04AB836FF}"/>
+              </a:ext>
+            </a:extLst>
+          </p:cNvPr>
+          <p:cNvSpPr txBox="1"/>
+          <p:nvPr/>
+        </p:nvSpPr>
+        <p:spPr>
+          <a:xfrm>
+            <a:off x="7629525" y="5979048"/>
+            <a:ext cx="4007957" cy="369332"/>
+          </a:xfrm>
+          <a:prstGeom prst="rect">
+            <a:avLst/>
+          </a:prstGeom>
+          <a:noFill/>
+        </p:spPr>
+        <p:txBody>
+          <a:bodyPr wrap="square" rtlCol="0">
+            <a:spAutoFit/>
+          </a:bodyPr>
+          <a:lstStyle/>
+          <a:p>
+            <a:r>
+              <a:rPr lang="en-US" dirty="0">
+                <a:latin typeface="Times New Roman" panose="02020603050405020304" pitchFamily="18" charset="0"/>
+                <a:cs typeface="Times New Roman" panose="02020603050405020304" pitchFamily="18" charset="0"/>
+              </a:rPr>
+              <a:t>HTML </a:t>
+            </a:r>
+            <a:r>
+              <a:rPr lang="ru-RU" dirty="0">
+                <a:latin typeface="Times New Roman" panose="02020603050405020304" pitchFamily="18" charset="0"/>
+                <a:cs typeface="Times New Roman" panose="02020603050405020304" pitchFamily="18" charset="0"/>
+              </a:rPr>
+              <a:t>код с разметкой формы на сайте</a:t>
+            </a:r>
+          </a:p>
+        </p:txBody>
+      </p:sp>
+    </p:spTree>
+    <p:extLst>
+      <p:ext uri="{BB962C8B-B14F-4D97-AF65-F5344CB8AC3E}">
+        <p14:creationId xmlns:p14="http://schemas.microsoft.com/office/powerpoint/2010/main" val="3760590180"/>
+      </p:ext>
+    </p:extLst>
+  </p:cSld>
+  <p:clrMapOvr>
+    <a:masterClrMapping/>
+  </p:clrMapOvr>
+</p:sld>
+</file>
+
+<file path=ppt/slides/slide11.xml><?xml version="1.0" encoding="utf-8"?>
+<p:sld xmlns:a="http://schemas.openxmlformats.org/drawingml/2006/main" xmlns:r="http://schemas.openxmlformats.org/officeDocument/2006/relationships" xmlns:p="http://schemas.openxmlformats.org/presentationml/2006/main">
+  <p:cSld>
+    <p:spTree>
+      <p:nvGrpSpPr>
+        <p:cNvPr id="1" name=""/>
+        <p:cNvGrpSpPr/>
+        <p:nvPr/>
+      </p:nvGrpSpPr>
+      <p:grpSpPr>
+        <a:xfrm>
+          <a:off x="0" y="0"/>
+          <a:ext cx="0" cy="0"/>
+          <a:chOff x="0" y="0"/>
+          <a:chExt cx="0" cy="0"/>
+        </a:xfrm>
+      </p:grpSpPr>
+      <p:sp>
+        <p:nvSpPr>
+          <p:cNvPr id="2" name="Заголовок 1">
+            <a:extLst>
+              <a:ext uri="{FF2B5EF4-FFF2-40B4-BE49-F238E27FC236}">
+                <a16:creationId xmlns:a16="http://schemas.microsoft.com/office/drawing/2014/main" id="{B8BF5641-8E16-4220-BABE-249F5274F6CA}"/>
+              </a:ext>
+            </a:extLst>
+          </p:cNvPr>
+          <p:cNvSpPr>
+            <a:spLocks noGrp="1"/>
+          </p:cNvSpPr>
+          <p:nvPr>
+            <p:ph type="title"/>
+          </p:nvPr>
+        </p:nvSpPr>
+        <p:spPr>
+          <a:xfrm>
+            <a:off x="787109" y="234892"/>
+            <a:ext cx="10515600" cy="939567"/>
+          </a:xfrm>
+        </p:spPr>
+        <p:txBody>
+          <a:bodyPr/>
+          <a:lstStyle/>
+          <a:p>
+            <a:r>
+              <a:rPr lang="ru-RU" dirty="0">
+                <a:latin typeface="Times New Roman" panose="02020603050405020304" pitchFamily="18" charset="0"/>
+                <a:cs typeface="Times New Roman" panose="02020603050405020304" pitchFamily="18" charset="0"/>
+              </a:rPr>
+              <a:t>Разработка веб-приложения</a:t>
+            </a:r>
+          </a:p>
+        </p:txBody>
+      </p:sp>
+      <p:sp>
+        <p:nvSpPr>
+          <p:cNvPr id="3" name="Текст 2">
+            <a:extLst>
+              <a:ext uri="{FF2B5EF4-FFF2-40B4-BE49-F238E27FC236}">
+                <a16:creationId xmlns:a16="http://schemas.microsoft.com/office/drawing/2014/main" id="{B9FC10D3-6877-4C4E-9C5E-3A603695325D}"/>
+              </a:ext>
+            </a:extLst>
+          </p:cNvPr>
+          <p:cNvSpPr>
+            <a:spLocks noGrp="1"/>
+          </p:cNvSpPr>
+          <p:nvPr>
+            <p:ph type="body" idx="1"/>
+          </p:nvPr>
+        </p:nvSpPr>
+        <p:spPr/>
+        <p:txBody>
+          <a:bodyPr>
+            <a:normAutofit/>
+          </a:bodyPr>
+          <a:lstStyle/>
+          <a:p>
+            <a:r>
+              <a:rPr lang="ru-RU" sz="1000" dirty="0">
+                <a:solidFill>
+                  <a:schemeClr val="bg1"/>
+                </a:solidFill>
+              </a:rPr>
+              <a:t>.</a:t>
+            </a:r>
+          </a:p>
+        </p:txBody>
+      </p:sp>
+      <p:pic>
+        <p:nvPicPr>
+          <p:cNvPr id="5" name="Рисунок 4">
+            <a:extLst>
+              <a:ext uri="{FF2B5EF4-FFF2-40B4-BE49-F238E27FC236}">
+                <a16:creationId xmlns:a16="http://schemas.microsoft.com/office/drawing/2014/main" id="{3F5DB819-D00F-4164-ACE0-C3F4A614DBF5}"/>
+              </a:ext>
+            </a:extLst>
+          </p:cNvPr>
+          <p:cNvPicPr>
+            <a:picLocks noChangeAspect="1"/>
+          </p:cNvPicPr>
+          <p:nvPr/>
+        </p:nvPicPr>
+        <p:blipFill rotWithShape="1">
+          <a:blip r:embed="rId2"/>
+          <a:srcRect l="13750" t="7592" r="15104" b="5000"/>
+          <a:stretch/>
+        </p:blipFill>
+        <p:spPr>
+          <a:xfrm>
+            <a:off x="2566842" y="1392772"/>
+            <a:ext cx="7058316" cy="4877781"/>
+          </a:xfrm>
+          <a:prstGeom prst="rect">
+            <a:avLst/>
+          </a:prstGeom>
+        </p:spPr>
+      </p:pic>
+      <p:sp>
+        <p:nvSpPr>
+          <p:cNvPr id="7" name="TextBox 6">
+            <a:extLst>
+              <a:ext uri="{FF2B5EF4-FFF2-40B4-BE49-F238E27FC236}">
+                <a16:creationId xmlns:a16="http://schemas.microsoft.com/office/drawing/2014/main" id="{024D0348-8F03-460C-A23C-766FD5DD5D63}"/>
+              </a:ext>
+            </a:extLst>
+          </p:cNvPr>
+          <p:cNvSpPr txBox="1"/>
+          <p:nvPr/>
+        </p:nvSpPr>
+        <p:spPr>
+          <a:xfrm>
+            <a:off x="3457575" y="6270553"/>
+            <a:ext cx="7721040" cy="369332"/>
+          </a:xfrm>
+          <a:prstGeom prst="rect">
+            <a:avLst/>
+          </a:prstGeom>
+          <a:noFill/>
+        </p:spPr>
+        <p:txBody>
+          <a:bodyPr wrap="square" rtlCol="0">
+            <a:spAutoFit/>
+          </a:bodyPr>
+          <a:lstStyle/>
+          <a:p>
+            <a:r>
+              <a:rPr lang="ru-RU" dirty="0">
+                <a:latin typeface="Times New Roman" panose="02020603050405020304" pitchFamily="18" charset="0"/>
+                <a:cs typeface="Times New Roman" panose="02020603050405020304" pitchFamily="18" charset="0"/>
+              </a:rPr>
+              <a:t>Страница сайта с формой для записи на консультацию</a:t>
+            </a:r>
+          </a:p>
+        </p:txBody>
+      </p:sp>
+    </p:spTree>
+    <p:extLst>
+      <p:ext uri="{BB962C8B-B14F-4D97-AF65-F5344CB8AC3E}">
+        <p14:creationId xmlns:p14="http://schemas.microsoft.com/office/powerpoint/2010/main" val="3618335534"/>
+      </p:ext>
+    </p:extLst>
+  </p:cSld>
+  <p:clrMapOvr>
+    <a:masterClrMapping/>
+  </p:clrMapOvr>
+</p:sld>
+</file>
+
+<file path=ppt/slides/slide12.xml><?xml version="1.0" encoding="utf-8"?>
+<p:sld xmlns:a="http://schemas.openxmlformats.org/drawingml/2006/main" xmlns:r="http://schemas.openxmlformats.org/officeDocument/2006/relationships" xmlns:p="http://schemas.openxmlformats.org/presentationml/2006/main">
+  <p:cSld>
+    <p:spTree>
+      <p:nvGrpSpPr>
+        <p:cNvPr id="1" name=""/>
+        <p:cNvGrpSpPr/>
+        <p:nvPr/>
+      </p:nvGrpSpPr>
+      <p:grpSpPr>
+        <a:xfrm>
+          <a:off x="0" y="0"/>
+          <a:ext cx="0" cy="0"/>
+          <a:chOff x="0" y="0"/>
+          <a:chExt cx="0" cy="0"/>
+        </a:xfrm>
+      </p:grpSpPr>
+      <p:sp>
+        <p:nvSpPr>
+          <p:cNvPr id="2" name="Заголовок 1">
+            <a:extLst>
+              <a:ext uri="{FF2B5EF4-FFF2-40B4-BE49-F238E27FC236}">
+                <a16:creationId xmlns:a16="http://schemas.microsoft.com/office/drawing/2014/main" id="{B8BF5641-8E16-4220-BABE-249F5274F6CA}"/>
+              </a:ext>
+            </a:extLst>
+          </p:cNvPr>
+          <p:cNvSpPr>
+            <a:spLocks noGrp="1"/>
+          </p:cNvSpPr>
+          <p:nvPr>
+            <p:ph type="title"/>
+          </p:nvPr>
+        </p:nvSpPr>
+        <p:spPr>
+          <a:xfrm>
+            <a:off x="787109" y="234892"/>
+            <a:ext cx="10515600" cy="939567"/>
+          </a:xfrm>
+        </p:spPr>
+        <p:txBody>
+          <a:bodyPr/>
+          <a:lstStyle/>
+          <a:p>
+            <a:r>
+              <a:rPr lang="ru-RU" dirty="0">
+                <a:latin typeface="Times New Roman" panose="02020603050405020304" pitchFamily="18" charset="0"/>
+                <a:cs typeface="Times New Roman" panose="02020603050405020304" pitchFamily="18" charset="0"/>
+              </a:rPr>
+              <a:t>Тестирование веб-приложения</a:t>
+            </a:r>
+          </a:p>
+        </p:txBody>
+      </p:sp>
+      <p:sp>
+        <p:nvSpPr>
+          <p:cNvPr id="3" name="Текст 2">
+            <a:extLst>
+              <a:ext uri="{FF2B5EF4-FFF2-40B4-BE49-F238E27FC236}">
+                <a16:creationId xmlns:a16="http://schemas.microsoft.com/office/drawing/2014/main" id="{B9FC10D3-6877-4C4E-9C5E-3A603695325D}"/>
+              </a:ext>
+            </a:extLst>
+          </p:cNvPr>
+          <p:cNvSpPr>
+            <a:spLocks noGrp="1"/>
+          </p:cNvSpPr>
+          <p:nvPr>
+            <p:ph type="body" idx="1"/>
+          </p:nvPr>
+        </p:nvSpPr>
+        <p:spPr/>
+        <p:txBody>
+          <a:bodyPr>
+            <a:normAutofit/>
+          </a:bodyPr>
+          <a:lstStyle/>
+          <a:p>
+            <a:r>
+              <a:rPr lang="ru-RU" sz="1000" dirty="0">
+                <a:solidFill>
+                  <a:schemeClr val="bg1"/>
+                </a:solidFill>
+              </a:rPr>
+              <a:t>.</a:t>
+            </a:r>
+          </a:p>
+        </p:txBody>
+      </p:sp>
+      <p:sp>
+        <p:nvSpPr>
+          <p:cNvPr id="7" name="TextBox 6">
+            <a:extLst>
+              <a:ext uri="{FF2B5EF4-FFF2-40B4-BE49-F238E27FC236}">
+                <a16:creationId xmlns:a16="http://schemas.microsoft.com/office/drawing/2014/main" id="{94149D49-7319-44AB-9037-FD82C9DF2966}"/>
+              </a:ext>
+            </a:extLst>
+          </p:cNvPr>
+          <p:cNvSpPr txBox="1"/>
+          <p:nvPr/>
+        </p:nvSpPr>
+        <p:spPr>
+          <a:xfrm>
+            <a:off x="831851" y="1485900"/>
+            <a:ext cx="11093450" cy="1815882"/>
+          </a:xfrm>
+          <a:prstGeom prst="rect">
+            <a:avLst/>
+          </a:prstGeom>
+          <a:noFill/>
+        </p:spPr>
+        <p:txBody>
+          <a:bodyPr wrap="square" rtlCol="0">
+            <a:spAutoFit/>
+          </a:bodyPr>
+          <a:lstStyle/>
+          <a:p>
+            <a:r>
+              <a:rPr lang="ru-RU" sz="2800" dirty="0">
+                <a:latin typeface="Times New Roman" panose="02020603050405020304" pitchFamily="18" charset="0"/>
+                <a:cs typeface="Times New Roman" panose="02020603050405020304" pitchFamily="18" charset="0"/>
+              </a:rPr>
+              <a:t>В ходе проверки работоспособности веб-приложения было сделано:</a:t>
+            </a:r>
+          </a:p>
+          <a:p>
+            <a:pPr marL="342900" indent="-342900">
+              <a:buAutoNum type="arabicPeriod"/>
+            </a:pPr>
+            <a:r>
+              <a:rPr lang="ru-RU" sz="2800" dirty="0">
+                <a:latin typeface="Times New Roman" panose="02020603050405020304" pitchFamily="18" charset="0"/>
+                <a:cs typeface="Times New Roman" panose="02020603050405020304" pitchFamily="18" charset="0"/>
+              </a:rPr>
+              <a:t>Кросс-платформенное тестирование</a:t>
+            </a:r>
+          </a:p>
+          <a:p>
+            <a:pPr marL="342900" indent="-342900">
+              <a:buAutoNum type="arabicPeriod"/>
+            </a:pPr>
+            <a:r>
+              <a:rPr lang="ru-RU" sz="2800" dirty="0">
+                <a:latin typeface="Times New Roman" panose="02020603050405020304" pitchFamily="18" charset="0"/>
+                <a:cs typeface="Times New Roman" panose="02020603050405020304" pitchFamily="18" charset="0"/>
+              </a:rPr>
+              <a:t>Модульное тестирование</a:t>
+            </a:r>
+          </a:p>
+          <a:p>
+            <a:pPr marL="342900" indent="-342900">
+              <a:buAutoNum type="arabicPeriod"/>
+            </a:pPr>
+            <a:r>
+              <a:rPr lang="ru-RU" sz="2800" dirty="0">
+                <a:latin typeface="Times New Roman" panose="02020603050405020304" pitchFamily="18" charset="0"/>
+                <a:cs typeface="Times New Roman" panose="02020603050405020304" pitchFamily="18" charset="0"/>
+              </a:rPr>
+              <a:t>Системное тестирование</a:t>
+            </a:r>
+          </a:p>
+        </p:txBody>
+      </p:sp>
+      <p:pic>
+        <p:nvPicPr>
+          <p:cNvPr id="8" name="Рисунок 7">
+            <a:extLst>
+              <a:ext uri="{FF2B5EF4-FFF2-40B4-BE49-F238E27FC236}">
+                <a16:creationId xmlns:a16="http://schemas.microsoft.com/office/drawing/2014/main" id="{BDDFEC82-44DD-48A3-BA87-536CFF9CBC44}"/>
+              </a:ext>
+            </a:extLst>
+          </p:cNvPr>
+          <p:cNvPicPr>
+            <a:picLocks noChangeAspect="1"/>
+          </p:cNvPicPr>
+          <p:nvPr/>
+        </p:nvPicPr>
+        <p:blipFill rotWithShape="1">
+          <a:blip r:embed="rId2"/>
+          <a:srcRect l="25079" t="14445" r="54062" b="5694"/>
+          <a:stretch/>
+        </p:blipFill>
+        <p:spPr>
+          <a:xfrm>
+            <a:off x="7820025" y="1933575"/>
+            <a:ext cx="2114550" cy="4553804"/>
+          </a:xfrm>
+          <a:prstGeom prst="rect">
+            <a:avLst/>
+          </a:prstGeom>
+        </p:spPr>
+      </p:pic>
+      <p:sp>
+        <p:nvSpPr>
+          <p:cNvPr id="17" name="TextBox 16">
+            <a:extLst>
+              <a:ext uri="{FF2B5EF4-FFF2-40B4-BE49-F238E27FC236}">
+                <a16:creationId xmlns:a16="http://schemas.microsoft.com/office/drawing/2014/main" id="{67090803-B5E7-45FC-B744-FBB702144CEB}"/>
+              </a:ext>
+            </a:extLst>
+          </p:cNvPr>
+          <p:cNvSpPr txBox="1"/>
+          <p:nvPr/>
+        </p:nvSpPr>
+        <p:spPr>
+          <a:xfrm>
+            <a:off x="6715125" y="6457950"/>
+            <a:ext cx="5368586" cy="369332"/>
+          </a:xfrm>
+          <a:prstGeom prst="rect">
+            <a:avLst/>
+          </a:prstGeom>
+          <a:noFill/>
+        </p:spPr>
+        <p:txBody>
+          <a:bodyPr wrap="none" rtlCol="0">
+            <a:spAutoFit/>
+          </a:bodyPr>
+          <a:lstStyle/>
+          <a:p>
+            <a:r>
+              <a:rPr lang="ru-RU" dirty="0">
+                <a:latin typeface="Times New Roman" panose="02020603050405020304" pitchFamily="18" charset="0"/>
+                <a:cs typeface="Times New Roman" panose="02020603050405020304" pitchFamily="18" charset="0"/>
+              </a:rPr>
+              <a:t>Отображение формы сайта с мобильного устройства</a:t>
+            </a:r>
+          </a:p>
+        </p:txBody>
+      </p:sp>
+    </p:spTree>
+    <p:extLst>
+      <p:ext uri="{BB962C8B-B14F-4D97-AF65-F5344CB8AC3E}">
+        <p14:creationId xmlns:p14="http://schemas.microsoft.com/office/powerpoint/2010/main" val="4154370779"/>
+      </p:ext>
+    </p:extLst>
+  </p:cSld>
+  <p:clrMapOvr>
+    <a:masterClrMapping/>
+  </p:clrMapOvr>
+</p:sld>
+</file>
+
+<file path=ppt/slides/slide13.xml><?xml version="1.0" encoding="utf-8"?>
+<p:sld xmlns:a="http://schemas.openxmlformats.org/drawingml/2006/main" xmlns:r="http://schemas.openxmlformats.org/officeDocument/2006/relationships" xmlns:p="http://schemas.openxmlformats.org/presentationml/2006/main">
+  <p:cSld>
+    <p:spTree>
+      <p:nvGrpSpPr>
+        <p:cNvPr id="1" name=""/>
+        <p:cNvGrpSpPr/>
+        <p:nvPr/>
+      </p:nvGrpSpPr>
+      <p:grpSpPr>
+        <a:xfrm>
+          <a:off x="0" y="0"/>
+          <a:ext cx="0" cy="0"/>
+          <a:chOff x="0" y="0"/>
+          <a:chExt cx="0" cy="0"/>
+        </a:xfrm>
+      </p:grpSpPr>
+      <p:sp>
+        <p:nvSpPr>
+          <p:cNvPr id="2" name="Заголовок 1">
+            <a:extLst>
+              <a:ext uri="{FF2B5EF4-FFF2-40B4-BE49-F238E27FC236}">
+                <a16:creationId xmlns:a16="http://schemas.microsoft.com/office/drawing/2014/main" id="{B8BF5641-8E16-4220-BABE-249F5274F6CA}"/>
+              </a:ext>
+            </a:extLst>
+          </p:cNvPr>
+          <p:cNvSpPr>
+            <a:spLocks noGrp="1"/>
+          </p:cNvSpPr>
+          <p:nvPr>
+            <p:ph type="title"/>
+          </p:nvPr>
+        </p:nvSpPr>
+        <p:spPr>
+          <a:xfrm>
+            <a:off x="787109" y="234892"/>
+            <a:ext cx="10515600" cy="939567"/>
+          </a:xfrm>
+        </p:spPr>
+        <p:txBody>
+          <a:bodyPr/>
+          <a:lstStyle/>
+          <a:p>
+            <a:r>
+              <a:rPr lang="ru-RU" dirty="0">
+                <a:latin typeface="Times New Roman" panose="02020603050405020304" pitchFamily="18" charset="0"/>
+                <a:cs typeface="Times New Roman" panose="02020603050405020304" pitchFamily="18" charset="0"/>
+              </a:rPr>
+              <a:t>Заключение</a:t>
+            </a:r>
+          </a:p>
+        </p:txBody>
+      </p:sp>
+      <p:sp>
+        <p:nvSpPr>
+          <p:cNvPr id="3" name="Текст 2">
+            <a:extLst>
+              <a:ext uri="{FF2B5EF4-FFF2-40B4-BE49-F238E27FC236}">
+                <a16:creationId xmlns:a16="http://schemas.microsoft.com/office/drawing/2014/main" id="{B9FC10D3-6877-4C4E-9C5E-3A603695325D}"/>
+              </a:ext>
+            </a:extLst>
+          </p:cNvPr>
+          <p:cNvSpPr>
+            <a:spLocks noGrp="1"/>
+          </p:cNvSpPr>
+          <p:nvPr>
+            <p:ph type="body" idx="1"/>
+          </p:nvPr>
+        </p:nvSpPr>
+        <p:spPr>
+          <a:xfrm flipV="1">
+            <a:off x="8524874" y="6089650"/>
+            <a:ext cx="2822575" cy="82550"/>
+          </a:xfrm>
+        </p:spPr>
+        <p:txBody>
+          <a:bodyPr>
+            <a:normAutofit fontScale="25000" lnSpcReduction="20000"/>
+          </a:bodyPr>
+          <a:lstStyle/>
+          <a:p>
+            <a:r>
+              <a:rPr lang="ru-RU" sz="1000" dirty="0">
+                <a:solidFill>
+                  <a:schemeClr val="bg1"/>
+                </a:solidFill>
+              </a:rPr>
+              <a:t>.</a:t>
+            </a:r>
+          </a:p>
+        </p:txBody>
+      </p:sp>
+      <p:sp>
+        <p:nvSpPr>
+          <p:cNvPr id="7" name="TextBox 6">
+            <a:extLst>
+              <a:ext uri="{FF2B5EF4-FFF2-40B4-BE49-F238E27FC236}">
+                <a16:creationId xmlns:a16="http://schemas.microsoft.com/office/drawing/2014/main" id="{94149D49-7319-44AB-9037-FD82C9DF2966}"/>
+              </a:ext>
+            </a:extLst>
+          </p:cNvPr>
+          <p:cNvSpPr txBox="1"/>
+          <p:nvPr/>
+        </p:nvSpPr>
+        <p:spPr>
+          <a:xfrm>
+            <a:off x="831851" y="1485900"/>
+            <a:ext cx="11093450" cy="2677656"/>
+          </a:xfrm>
+          <a:prstGeom prst="rect">
+            <a:avLst/>
+          </a:prstGeom>
+          <a:noFill/>
+        </p:spPr>
+        <p:txBody>
+          <a:bodyPr wrap="square" rtlCol="0">
+            <a:spAutoFit/>
+          </a:bodyPr>
+          <a:lstStyle/>
+          <a:p>
+            <a:r>
+              <a:rPr lang="ru-RU" sz="2800" dirty="0">
+                <a:latin typeface="Times New Roman" panose="02020603050405020304" pitchFamily="18" charset="0"/>
+                <a:cs typeface="Times New Roman" panose="02020603050405020304" pitchFamily="18" charset="0"/>
+              </a:rPr>
+              <a:t>В рамках данной курсовой работы, мною было спроектировано и разработано веб-приложение сайта образовательного учреждения, которое может являться достойным проектом в портфолио и демонстрирует мои профессиональные компетенции. Проект получился современным, функциональным и готовым к масштабированию. </a:t>
+            </a:r>
+          </a:p>
+        </p:txBody>
+      </p:sp>
+      <p:pic>
+        <p:nvPicPr>
+          <p:cNvPr id="5" name="Рисунок 4">
+            <a:extLst>
+              <a:ext uri="{FF2B5EF4-FFF2-40B4-BE49-F238E27FC236}">
+                <a16:creationId xmlns:a16="http://schemas.microsoft.com/office/drawing/2014/main" id="{A2BC6828-3AAA-4D8B-BD5E-6D6FBC6016D9}"/>
+              </a:ext>
+            </a:extLst>
+          </p:cNvPr>
+          <p:cNvPicPr>
+            <a:picLocks noChangeAspect="1"/>
+          </p:cNvPicPr>
+          <p:nvPr/>
+        </p:nvPicPr>
+        <p:blipFill>
+          <a:blip r:embed="rId2">
+            <a:extLst>
+              <a:ext uri="{28A0092B-C50C-407E-A947-70E740481C1C}">
+                <a14:useLocalDpi xmlns:a14="http://schemas.microsoft.com/office/drawing/2010/main" val="0"/>
+              </a:ext>
+            </a:extLst>
+          </a:blip>
+          <a:stretch>
+            <a:fillRect/>
+          </a:stretch>
+        </p:blipFill>
+        <p:spPr>
+          <a:xfrm>
+            <a:off x="3326971" y="4422829"/>
+            <a:ext cx="1898541" cy="1898541"/>
+          </a:xfrm>
+          <a:prstGeom prst="rect">
+            <a:avLst/>
+          </a:prstGeom>
+        </p:spPr>
+      </p:pic>
+      <p:sp>
+        <p:nvSpPr>
+          <p:cNvPr id="6" name="TextBox 5">
+            <a:extLst>
+              <a:ext uri="{FF2B5EF4-FFF2-40B4-BE49-F238E27FC236}">
+                <a16:creationId xmlns:a16="http://schemas.microsoft.com/office/drawing/2014/main" id="{8A59EA67-8F06-4F36-8D49-093E4E2132F3}"/>
+              </a:ext>
+            </a:extLst>
+          </p:cNvPr>
+          <p:cNvSpPr txBox="1"/>
+          <p:nvPr/>
+        </p:nvSpPr>
+        <p:spPr>
+          <a:xfrm>
+            <a:off x="5713009" y="4757271"/>
+            <a:ext cx="729687" cy="369332"/>
+          </a:xfrm>
+          <a:prstGeom prst="rect">
+            <a:avLst/>
+          </a:prstGeom>
+          <a:noFill/>
+        </p:spPr>
+        <p:txBody>
+          <a:bodyPr wrap="none" rtlCol="0">
+            <a:spAutoFit/>
+          </a:bodyPr>
+          <a:lstStyle/>
+          <a:p>
+            <a:r>
+              <a:rPr lang="ru-RU" dirty="0">
+                <a:latin typeface="Times New Roman" panose="02020603050405020304" pitchFamily="18" charset="0"/>
+                <a:cs typeface="Times New Roman" panose="02020603050405020304" pitchFamily="18" charset="0"/>
+              </a:rPr>
+              <a:t>Сайт:</a:t>
+            </a:r>
+          </a:p>
+        </p:txBody>
+      </p:sp>
+      <p:sp>
+        <p:nvSpPr>
+          <p:cNvPr id="8" name="TextBox 7">
+            <a:extLst>
+              <a:ext uri="{FF2B5EF4-FFF2-40B4-BE49-F238E27FC236}">
+                <a16:creationId xmlns:a16="http://schemas.microsoft.com/office/drawing/2014/main" id="{2DDFEAC3-6637-43EE-AEC2-6821DCA4E97F}"/>
+              </a:ext>
+            </a:extLst>
+          </p:cNvPr>
+          <p:cNvSpPr txBox="1"/>
+          <p:nvPr/>
+        </p:nvSpPr>
+        <p:spPr>
+          <a:xfrm>
+            <a:off x="939509" y="4772025"/>
+            <a:ext cx="2539862" cy="369332"/>
+          </a:xfrm>
+          <a:prstGeom prst="rect">
+            <a:avLst/>
+          </a:prstGeom>
+          <a:noFill/>
+        </p:spPr>
+        <p:txBody>
+          <a:bodyPr wrap="none" rtlCol="0">
+            <a:spAutoFit/>
+          </a:bodyPr>
+          <a:lstStyle/>
+          <a:p>
+            <a:r>
+              <a:rPr lang="ru-RU" dirty="0">
+                <a:latin typeface="Times New Roman" panose="02020603050405020304" pitchFamily="18" charset="0"/>
+                <a:cs typeface="Times New Roman" panose="02020603050405020304" pitchFamily="18" charset="0"/>
+              </a:rPr>
+              <a:t>Репозиторий на </a:t>
+            </a:r>
+            <a:r>
+              <a:rPr lang="en-US" dirty="0">
+                <a:latin typeface="Times New Roman" panose="02020603050405020304" pitchFamily="18" charset="0"/>
+                <a:cs typeface="Times New Roman" panose="02020603050405020304" pitchFamily="18" charset="0"/>
+              </a:rPr>
+              <a:t>GitHub:</a:t>
+            </a:r>
+            <a:endParaRPr lang="ru-RU" dirty="0">
+              <a:latin typeface="Times New Roman" panose="02020603050405020304" pitchFamily="18" charset="0"/>
+              <a:cs typeface="Times New Roman" panose="02020603050405020304" pitchFamily="18" charset="0"/>
+            </a:endParaRPr>
+          </a:p>
+        </p:txBody>
+      </p:sp>
+      <p:pic>
+        <p:nvPicPr>
+          <p:cNvPr id="10" name="Рисунок 9">
+            <a:extLst>
+              <a:ext uri="{FF2B5EF4-FFF2-40B4-BE49-F238E27FC236}">
+                <a16:creationId xmlns:a16="http://schemas.microsoft.com/office/drawing/2014/main" id="{1D754E92-AF83-411B-BE3F-A09D007F059C}"/>
+              </a:ext>
+            </a:extLst>
+          </p:cNvPr>
+          <p:cNvPicPr>
+            <a:picLocks noChangeAspect="1"/>
+          </p:cNvPicPr>
+          <p:nvPr/>
+        </p:nvPicPr>
+        <p:blipFill>
+          <a:blip r:embed="rId3">
+            <a:extLst>
+              <a:ext uri="{28A0092B-C50C-407E-A947-70E740481C1C}">
+                <a14:useLocalDpi xmlns:a14="http://schemas.microsoft.com/office/drawing/2010/main" val="0"/>
+              </a:ext>
+            </a:extLst>
+          </a:blip>
+          <a:stretch>
+            <a:fillRect/>
+          </a:stretch>
+        </p:blipFill>
+        <p:spPr>
+          <a:xfrm>
+            <a:off x="6404704" y="4422829"/>
+            <a:ext cx="1802133" cy="1802133"/>
+          </a:xfrm>
+          <a:prstGeom prst="rect">
+            <a:avLst/>
+          </a:prstGeom>
+        </p:spPr>
+      </p:pic>
+    </p:spTree>
+    <p:extLst>
+      <p:ext uri="{BB962C8B-B14F-4D97-AF65-F5344CB8AC3E}">
+        <p14:creationId xmlns:p14="http://schemas.microsoft.com/office/powerpoint/2010/main" val="1604497036"/>
+      </p:ext>
+    </p:extLst>
+  </p:cSld>
+  <p:clrMapOvr>
+    <a:masterClrMapping/>
+  </p:clrMapOvr>
+</p:sld>
+</file>
+
 <file path=ppt/slides/slide2.xml><?xml version="1.0" encoding="utf-8"?>
 <p:sld xmlns:a="http://schemas.openxmlformats.org/drawingml/2006/main" xmlns:r="http://schemas.openxmlformats.org/officeDocument/2006/relationships" xmlns:p="http://schemas.openxmlformats.org/presentationml/2006/main">
   <p:cSld>
@@ -3776,8 +5094,8 @@
         </p:nvSpPr>
         <p:spPr>
           <a:xfrm>
-            <a:off x="831850" y="1702965"/>
-            <a:ext cx="10515600" cy="4386685"/>
+            <a:off x="831850" y="4404219"/>
+            <a:ext cx="9595666" cy="2197159"/>
           </a:xfrm>
         </p:spPr>
         <p:txBody>
@@ -3787,7 +5105,7 @@
           <a:lstStyle/>
           <a:p>
             <a:r>
-              <a:rPr lang="ru-RU" sz="3600" dirty="0">
+              <a:rPr lang="ru-RU" sz="2000" dirty="0">
                 <a:solidFill>
                   <a:schemeClr val="tx1"/>
                 </a:solidFill>
@@ -3802,7 +5120,7 @@
               <a:buAutoNum type="arabicPeriod"/>
             </a:pPr>
             <a:r>
-              <a:rPr lang="ru-RU" sz="3600" dirty="0">
+              <a:rPr lang="ru-RU" sz="2000" dirty="0">
                 <a:solidFill>
                   <a:schemeClr val="tx1"/>
                 </a:solidFill>
@@ -3817,7 +5135,7 @@
               <a:buAutoNum type="arabicPeriod"/>
             </a:pPr>
             <a:r>
-              <a:rPr lang="ru-RU" sz="3600" dirty="0">
+              <a:rPr lang="ru-RU" sz="2000" dirty="0">
                 <a:solidFill>
                   <a:schemeClr val="tx1"/>
                 </a:solidFill>
@@ -3832,7 +5150,7 @@
               <a:buAutoNum type="arabicPeriod"/>
             </a:pPr>
             <a:r>
-              <a:rPr lang="ru-RU" sz="3600" dirty="0">
+              <a:rPr lang="ru-RU" sz="2000" dirty="0">
                 <a:solidFill>
                   <a:schemeClr val="tx1"/>
                 </a:solidFill>
@@ -3844,10 +5162,1360 @@
           </a:p>
         </p:txBody>
       </p:sp>
+      <p:pic>
+        <p:nvPicPr>
+          <p:cNvPr id="4" name="Рисунок 3">
+            <a:extLst>
+              <a:ext uri="{FF2B5EF4-FFF2-40B4-BE49-F238E27FC236}">
+                <a16:creationId xmlns:a16="http://schemas.microsoft.com/office/drawing/2014/main" id="{F8A16231-D28A-41C9-8696-661DA2ACA616}"/>
+              </a:ext>
+            </a:extLst>
+          </p:cNvPr>
+          <p:cNvPicPr/>
+          <p:nvPr/>
+        </p:nvPicPr>
+        <p:blipFill rotWithShape="1">
+          <a:blip r:embed="rId2"/>
+          <a:srcRect l="1164" t="7819" r="1162" b="4104"/>
+          <a:stretch/>
+        </p:blipFill>
+        <p:spPr bwMode="auto">
+          <a:xfrm>
+            <a:off x="295275" y="1191237"/>
+            <a:ext cx="5800725" cy="2941955"/>
+          </a:xfrm>
+          <a:prstGeom prst="rect">
+            <a:avLst/>
+          </a:prstGeom>
+          <a:ln>
+            <a:noFill/>
+          </a:ln>
+          <a:extLst>
+            <a:ext uri="{53640926-AAD7-44D8-BBD7-CCE9431645EC}">
+              <a14:shadowObscured xmlns:a14="http://schemas.microsoft.com/office/drawing/2010/main"/>
+            </a:ext>
+          </a:extLst>
+        </p:spPr>
+      </p:pic>
+      <p:pic>
+        <p:nvPicPr>
+          <p:cNvPr id="5" name="Рисунок 4">
+            <a:extLst>
+              <a:ext uri="{FF2B5EF4-FFF2-40B4-BE49-F238E27FC236}">
+                <a16:creationId xmlns:a16="http://schemas.microsoft.com/office/drawing/2014/main" id="{028E20B4-6106-459A-BE8E-2AF0429D611B}"/>
+              </a:ext>
+            </a:extLst>
+          </p:cNvPr>
+          <p:cNvPicPr/>
+          <p:nvPr/>
+        </p:nvPicPr>
+        <p:blipFill rotWithShape="1">
+          <a:blip r:embed="rId3"/>
+          <a:srcRect t="7588" b="4322"/>
+          <a:stretch/>
+        </p:blipFill>
+        <p:spPr bwMode="auto">
+          <a:xfrm>
+            <a:off x="6627050" y="1232865"/>
+            <a:ext cx="5256975" cy="2942590"/>
+          </a:xfrm>
+          <a:prstGeom prst="rect">
+            <a:avLst/>
+          </a:prstGeom>
+          <a:ln>
+            <a:noFill/>
+          </a:ln>
+          <a:extLst>
+            <a:ext uri="{53640926-AAD7-44D8-BBD7-CCE9431645EC}">
+              <a14:shadowObscured xmlns:a14="http://schemas.microsoft.com/office/drawing/2010/main"/>
+            </a:ext>
+          </a:extLst>
+        </p:spPr>
+      </p:pic>
     </p:spTree>
     <p:extLst>
       <p:ext uri="{BB962C8B-B14F-4D97-AF65-F5344CB8AC3E}">
         <p14:creationId xmlns:p14="http://schemas.microsoft.com/office/powerpoint/2010/main" val="1549707765"/>
+      </p:ext>
+    </p:extLst>
+  </p:cSld>
+  <p:clrMapOvr>
+    <a:masterClrMapping/>
+  </p:clrMapOvr>
+</p:sld>
+</file>
+
+<file path=ppt/slides/slide4.xml><?xml version="1.0" encoding="utf-8"?>
+<p:sld xmlns:a="http://schemas.openxmlformats.org/drawingml/2006/main" xmlns:r="http://schemas.openxmlformats.org/officeDocument/2006/relationships" xmlns:p="http://schemas.openxmlformats.org/presentationml/2006/main">
+  <p:cSld>
+    <p:spTree>
+      <p:nvGrpSpPr>
+        <p:cNvPr id="1" name=""/>
+        <p:cNvGrpSpPr/>
+        <p:nvPr/>
+      </p:nvGrpSpPr>
+      <p:grpSpPr>
+        <a:xfrm>
+          <a:off x="0" y="0"/>
+          <a:ext cx="0" cy="0"/>
+          <a:chOff x="0" y="0"/>
+          <a:chExt cx="0" cy="0"/>
+        </a:xfrm>
+      </p:grpSpPr>
+      <p:sp>
+        <p:nvSpPr>
+          <p:cNvPr id="2" name="Заголовок 1">
+            <a:extLst>
+              <a:ext uri="{FF2B5EF4-FFF2-40B4-BE49-F238E27FC236}">
+                <a16:creationId xmlns:a16="http://schemas.microsoft.com/office/drawing/2014/main" id="{17560F76-5836-43CF-86F6-1761D29B6F02}"/>
+              </a:ext>
+            </a:extLst>
+          </p:cNvPr>
+          <p:cNvSpPr>
+            <a:spLocks noGrp="1"/>
+          </p:cNvSpPr>
+          <p:nvPr>
+            <p:ph type="title"/>
+          </p:nvPr>
+        </p:nvSpPr>
+        <p:spPr>
+          <a:xfrm>
+            <a:off x="1058353" y="-2885813"/>
+            <a:ext cx="10515600" cy="4068661"/>
+          </a:xfrm>
+        </p:spPr>
+        <p:txBody>
+          <a:bodyPr/>
+          <a:lstStyle/>
+          <a:p>
+            <a:r>
+              <a:rPr lang="ru-RU" dirty="0">
+                <a:latin typeface="Times New Roman" panose="02020603050405020304" pitchFamily="18" charset="0"/>
+                <a:cs typeface="Times New Roman" panose="02020603050405020304" pitchFamily="18" charset="0"/>
+              </a:rPr>
+              <a:t>Используемые технологии</a:t>
+            </a:r>
+          </a:p>
+        </p:txBody>
+      </p:sp>
+      <p:sp>
+        <p:nvSpPr>
+          <p:cNvPr id="3" name="Текст 2">
+            <a:extLst>
+              <a:ext uri="{FF2B5EF4-FFF2-40B4-BE49-F238E27FC236}">
+                <a16:creationId xmlns:a16="http://schemas.microsoft.com/office/drawing/2014/main" id="{A5D602EC-0B62-4C30-A306-8488E2D69099}"/>
+              </a:ext>
+            </a:extLst>
+          </p:cNvPr>
+          <p:cNvSpPr>
+            <a:spLocks noGrp="1"/>
+          </p:cNvSpPr>
+          <p:nvPr>
+            <p:ph type="body" idx="1"/>
+          </p:nvPr>
+        </p:nvSpPr>
+        <p:spPr>
+          <a:xfrm>
+            <a:off x="831850" y="1526797"/>
+            <a:ext cx="10515600" cy="4562854"/>
+          </a:xfrm>
+        </p:spPr>
+        <p:txBody>
+          <a:bodyPr/>
+          <a:lstStyle/>
+          <a:p>
+            <a:r>
+              <a:rPr lang="ru-RU" dirty="0">
+                <a:solidFill>
+                  <a:schemeClr val="tx1"/>
+                </a:solidFill>
+                <a:latin typeface="Times New Roman" panose="02020603050405020304" pitchFamily="18" charset="0"/>
+                <a:cs typeface="Times New Roman" panose="02020603050405020304" pitchFamily="18" charset="0"/>
+              </a:rPr>
+              <a:t>Для серверной части: </a:t>
+            </a:r>
+            <a:r>
+              <a:rPr lang="en-US" dirty="0">
+                <a:solidFill>
+                  <a:schemeClr val="tx1"/>
+                </a:solidFill>
+                <a:latin typeface="Times New Roman" panose="02020603050405020304" pitchFamily="18" charset="0"/>
+                <a:cs typeface="Times New Roman" panose="02020603050405020304" pitchFamily="18" charset="0"/>
+              </a:rPr>
+              <a:t>Python, </a:t>
+            </a:r>
+            <a:r>
+              <a:rPr lang="en-US" dirty="0" err="1">
+                <a:solidFill>
+                  <a:schemeClr val="tx1"/>
+                </a:solidFill>
+                <a:latin typeface="Times New Roman" panose="02020603050405020304" pitchFamily="18" charset="0"/>
+                <a:cs typeface="Times New Roman" panose="02020603050405020304" pitchFamily="18" charset="0"/>
+              </a:rPr>
+              <a:t>FastAPI</a:t>
+            </a:r>
+            <a:r>
+              <a:rPr lang="en-US" dirty="0">
+                <a:solidFill>
+                  <a:schemeClr val="tx1"/>
+                </a:solidFill>
+                <a:latin typeface="Times New Roman" panose="02020603050405020304" pitchFamily="18" charset="0"/>
+                <a:cs typeface="Times New Roman" panose="02020603050405020304" pitchFamily="18" charset="0"/>
+              </a:rPr>
+              <a:t>, Celery, Redis</a:t>
+            </a:r>
+            <a:r>
+              <a:rPr lang="ru-RU" dirty="0">
+                <a:solidFill>
+                  <a:schemeClr val="tx1"/>
+                </a:solidFill>
+                <a:latin typeface="Times New Roman" panose="02020603050405020304" pitchFamily="18" charset="0"/>
+                <a:cs typeface="Times New Roman" panose="02020603050405020304" pitchFamily="18" charset="0"/>
+              </a:rPr>
+              <a:t>, </a:t>
+            </a:r>
+            <a:r>
+              <a:rPr lang="en-US" dirty="0" err="1">
+                <a:solidFill>
+                  <a:schemeClr val="tx1"/>
+                </a:solidFill>
+                <a:latin typeface="Times New Roman" panose="02020603050405020304" pitchFamily="18" charset="0"/>
+                <a:cs typeface="Times New Roman" panose="02020603050405020304" pitchFamily="18" charset="0"/>
+              </a:rPr>
+              <a:t>SQLAlchemy</a:t>
+            </a:r>
+            <a:endParaRPr lang="en-US" dirty="0">
+              <a:solidFill>
+                <a:schemeClr val="tx1"/>
+              </a:solidFill>
+              <a:latin typeface="Times New Roman" panose="02020603050405020304" pitchFamily="18" charset="0"/>
+              <a:cs typeface="Times New Roman" panose="02020603050405020304" pitchFamily="18" charset="0"/>
+            </a:endParaRPr>
+          </a:p>
+          <a:p>
+            <a:r>
+              <a:rPr lang="ru-RU" dirty="0">
+                <a:solidFill>
+                  <a:schemeClr val="tx1"/>
+                </a:solidFill>
+                <a:latin typeface="Times New Roman" panose="02020603050405020304" pitchFamily="18" charset="0"/>
+                <a:cs typeface="Times New Roman" panose="02020603050405020304" pitchFamily="18" charset="0"/>
+              </a:rPr>
+              <a:t>Для клиентской части: </a:t>
+            </a:r>
+            <a:r>
+              <a:rPr lang="en-US" dirty="0">
+                <a:solidFill>
+                  <a:schemeClr val="tx1"/>
+                </a:solidFill>
+                <a:latin typeface="Times New Roman" panose="02020603050405020304" pitchFamily="18" charset="0"/>
+                <a:cs typeface="Times New Roman" panose="02020603050405020304" pitchFamily="18" charset="0"/>
+              </a:rPr>
+              <a:t>ReactJS, HTML, CSS, JS, </a:t>
+            </a:r>
+            <a:r>
+              <a:rPr lang="en-US" dirty="0" err="1">
+                <a:solidFill>
+                  <a:schemeClr val="tx1"/>
+                </a:solidFill>
+                <a:latin typeface="Times New Roman" panose="02020603050405020304" pitchFamily="18" charset="0"/>
+                <a:cs typeface="Times New Roman" panose="02020603050405020304" pitchFamily="18" charset="0"/>
+              </a:rPr>
+              <a:t>Axios</a:t>
+            </a:r>
+            <a:endParaRPr lang="en-US" dirty="0">
+              <a:solidFill>
+                <a:schemeClr val="tx1"/>
+              </a:solidFill>
+              <a:latin typeface="Times New Roman" panose="02020603050405020304" pitchFamily="18" charset="0"/>
+              <a:cs typeface="Times New Roman" panose="02020603050405020304" pitchFamily="18" charset="0"/>
+            </a:endParaRPr>
+          </a:p>
+          <a:p>
+            <a:r>
+              <a:rPr lang="ru-RU" dirty="0">
+                <a:solidFill>
+                  <a:schemeClr val="tx1"/>
+                </a:solidFill>
+                <a:latin typeface="Times New Roman" panose="02020603050405020304" pitchFamily="18" charset="0"/>
+                <a:cs typeface="Times New Roman" panose="02020603050405020304" pitchFamily="18" charset="0"/>
+              </a:rPr>
+              <a:t>Для базы данных: </a:t>
+            </a:r>
+            <a:r>
+              <a:rPr lang="en-US" dirty="0">
+                <a:solidFill>
+                  <a:schemeClr val="tx1"/>
+                </a:solidFill>
+                <a:latin typeface="Times New Roman" panose="02020603050405020304" pitchFamily="18" charset="0"/>
+                <a:cs typeface="Times New Roman" panose="02020603050405020304" pitchFamily="18" charset="0"/>
+              </a:rPr>
+              <a:t>PostgreSQL</a:t>
+            </a:r>
+          </a:p>
+          <a:p>
+            <a:r>
+              <a:rPr lang="ru-RU" dirty="0">
+                <a:solidFill>
+                  <a:schemeClr val="tx1"/>
+                </a:solidFill>
+                <a:latin typeface="Times New Roman" panose="02020603050405020304" pitchFamily="18" charset="0"/>
+                <a:cs typeface="Times New Roman" panose="02020603050405020304" pitchFamily="18" charset="0"/>
+              </a:rPr>
+              <a:t>Для </a:t>
+            </a:r>
+            <a:r>
+              <a:rPr lang="ru-RU" dirty="0" err="1">
+                <a:solidFill>
+                  <a:schemeClr val="tx1"/>
+                </a:solidFill>
+                <a:latin typeface="Times New Roman" panose="02020603050405020304" pitchFamily="18" charset="0"/>
+                <a:cs typeface="Times New Roman" panose="02020603050405020304" pitchFamily="18" charset="0"/>
+              </a:rPr>
+              <a:t>деплоя</a:t>
+            </a:r>
+            <a:r>
+              <a:rPr lang="ru-RU" dirty="0">
+                <a:solidFill>
+                  <a:schemeClr val="tx1"/>
+                </a:solidFill>
+                <a:latin typeface="Times New Roman" panose="02020603050405020304" pitchFamily="18" charset="0"/>
+                <a:cs typeface="Times New Roman" panose="02020603050405020304" pitchFamily="18" charset="0"/>
+              </a:rPr>
+              <a:t> проекта: </a:t>
+            </a:r>
+            <a:r>
+              <a:rPr lang="en-US" dirty="0">
+                <a:solidFill>
+                  <a:schemeClr val="tx1"/>
+                </a:solidFill>
+                <a:latin typeface="Times New Roman" panose="02020603050405020304" pitchFamily="18" charset="0"/>
+                <a:cs typeface="Times New Roman" panose="02020603050405020304" pitchFamily="18" charset="0"/>
+              </a:rPr>
+              <a:t>docker, docker-compose</a:t>
+            </a:r>
+          </a:p>
+          <a:p>
+            <a:r>
+              <a:rPr lang="ru-RU" dirty="0">
+                <a:solidFill>
+                  <a:schemeClr val="tx1"/>
+                </a:solidFill>
+                <a:latin typeface="Times New Roman" panose="02020603050405020304" pitchFamily="18" charset="0"/>
+                <a:cs typeface="Times New Roman" panose="02020603050405020304" pitchFamily="18" charset="0"/>
+              </a:rPr>
+              <a:t>Для управлением версиями проекта</a:t>
+            </a:r>
+            <a:r>
+              <a:rPr lang="en-US" dirty="0">
+                <a:solidFill>
+                  <a:schemeClr val="tx1"/>
+                </a:solidFill>
+                <a:latin typeface="Times New Roman" panose="02020603050405020304" pitchFamily="18" charset="0"/>
+                <a:cs typeface="Times New Roman" panose="02020603050405020304" pitchFamily="18" charset="0"/>
+              </a:rPr>
+              <a:t>: git</a:t>
+            </a:r>
+            <a:endParaRPr lang="ru-RU" dirty="0">
+              <a:solidFill>
+                <a:schemeClr val="tx1"/>
+              </a:solidFill>
+              <a:latin typeface="Times New Roman" panose="02020603050405020304" pitchFamily="18" charset="0"/>
+              <a:cs typeface="Times New Roman" panose="02020603050405020304" pitchFamily="18" charset="0"/>
+            </a:endParaRPr>
+          </a:p>
+        </p:txBody>
+      </p:sp>
+      <p:pic>
+        <p:nvPicPr>
+          <p:cNvPr id="5" name="Рисунок 4">
+            <a:extLst>
+              <a:ext uri="{FF2B5EF4-FFF2-40B4-BE49-F238E27FC236}">
+                <a16:creationId xmlns:a16="http://schemas.microsoft.com/office/drawing/2014/main" id="{38FEFB0E-B5E4-4E5A-859E-43ADA0B349DB}"/>
+              </a:ext>
+            </a:extLst>
+          </p:cNvPr>
+          <p:cNvPicPr>
+            <a:picLocks noChangeAspect="1"/>
+          </p:cNvPicPr>
+          <p:nvPr/>
+        </p:nvPicPr>
+        <p:blipFill>
+          <a:blip r:embed="rId2">
+            <a:extLst>
+              <a:ext uri="{28A0092B-C50C-407E-A947-70E740481C1C}">
+                <a14:useLocalDpi xmlns:a14="http://schemas.microsoft.com/office/drawing/2010/main" val="0"/>
+              </a:ext>
+            </a:extLst>
+          </a:blip>
+          <a:stretch>
+            <a:fillRect/>
+          </a:stretch>
+        </p:blipFill>
+        <p:spPr>
+          <a:xfrm>
+            <a:off x="10680852" y="5331203"/>
+            <a:ext cx="1333195" cy="1333195"/>
+          </a:xfrm>
+          <a:prstGeom prst="rect">
+            <a:avLst/>
+          </a:prstGeom>
+        </p:spPr>
+      </p:pic>
+      <p:pic>
+        <p:nvPicPr>
+          <p:cNvPr id="7" name="Рисунок 6">
+            <a:extLst>
+              <a:ext uri="{FF2B5EF4-FFF2-40B4-BE49-F238E27FC236}">
+                <a16:creationId xmlns:a16="http://schemas.microsoft.com/office/drawing/2014/main" id="{F920E55F-697E-4E9F-A157-E4F951604869}"/>
+              </a:ext>
+            </a:extLst>
+          </p:cNvPr>
+          <p:cNvPicPr>
+            <a:picLocks noChangeAspect="1"/>
+          </p:cNvPicPr>
+          <p:nvPr/>
+        </p:nvPicPr>
+        <p:blipFill>
+          <a:blip r:embed="rId3">
+            <a:extLst>
+              <a:ext uri="{28A0092B-C50C-407E-A947-70E740481C1C}">
+                <a14:useLocalDpi xmlns:a14="http://schemas.microsoft.com/office/drawing/2010/main" val="0"/>
+              </a:ext>
+            </a:extLst>
+          </a:blip>
+          <a:stretch>
+            <a:fillRect/>
+          </a:stretch>
+        </p:blipFill>
+        <p:spPr>
+          <a:xfrm>
+            <a:off x="9818603" y="635783"/>
+            <a:ext cx="1862145" cy="1862145"/>
+          </a:xfrm>
+          <a:prstGeom prst="rect">
+            <a:avLst/>
+          </a:prstGeom>
+        </p:spPr>
+      </p:pic>
+      <p:pic>
+        <p:nvPicPr>
+          <p:cNvPr id="9" name="Рисунок 8">
+            <a:extLst>
+              <a:ext uri="{FF2B5EF4-FFF2-40B4-BE49-F238E27FC236}">
+                <a16:creationId xmlns:a16="http://schemas.microsoft.com/office/drawing/2014/main" id="{7D3B48E1-DD4B-419F-867B-E0ED7A35C595}"/>
+              </a:ext>
+            </a:extLst>
+          </p:cNvPr>
+          <p:cNvPicPr>
+            <a:picLocks noChangeAspect="1"/>
+          </p:cNvPicPr>
+          <p:nvPr/>
+        </p:nvPicPr>
+        <p:blipFill>
+          <a:blip r:embed="rId4">
+            <a:extLst>
+              <a:ext uri="{28A0092B-C50C-407E-A947-70E740481C1C}">
+                <a14:useLocalDpi xmlns:a14="http://schemas.microsoft.com/office/drawing/2010/main" val="0"/>
+              </a:ext>
+            </a:extLst>
+          </a:blip>
+          <a:stretch>
+            <a:fillRect/>
+          </a:stretch>
+        </p:blipFill>
+        <p:spPr>
+          <a:xfrm>
+            <a:off x="303860" y="3977415"/>
+            <a:ext cx="1508986" cy="1508986"/>
+          </a:xfrm>
+          <a:prstGeom prst="rect">
+            <a:avLst/>
+          </a:prstGeom>
+        </p:spPr>
+      </p:pic>
+      <p:pic>
+        <p:nvPicPr>
+          <p:cNvPr id="11" name="Рисунок 10">
+            <a:extLst>
+              <a:ext uri="{FF2B5EF4-FFF2-40B4-BE49-F238E27FC236}">
+                <a16:creationId xmlns:a16="http://schemas.microsoft.com/office/drawing/2014/main" id="{F71CE3E1-EDC5-4DB2-A284-CB894CE087C2}"/>
+              </a:ext>
+            </a:extLst>
+          </p:cNvPr>
+          <p:cNvPicPr>
+            <a:picLocks noChangeAspect="1"/>
+          </p:cNvPicPr>
+          <p:nvPr/>
+        </p:nvPicPr>
+        <p:blipFill>
+          <a:blip r:embed="rId5">
+            <a:extLst>
+              <a:ext uri="{28A0092B-C50C-407E-A947-70E740481C1C}">
+                <a14:useLocalDpi xmlns:a14="http://schemas.microsoft.com/office/drawing/2010/main" val="0"/>
+              </a:ext>
+            </a:extLst>
+          </a:blip>
+          <a:stretch>
+            <a:fillRect/>
+          </a:stretch>
+        </p:blipFill>
+        <p:spPr>
+          <a:xfrm>
+            <a:off x="7658099" y="2796620"/>
+            <a:ext cx="1180795" cy="1180795"/>
+          </a:xfrm>
+          <a:prstGeom prst="rect">
+            <a:avLst/>
+          </a:prstGeom>
+        </p:spPr>
+      </p:pic>
+      <p:pic>
+        <p:nvPicPr>
+          <p:cNvPr id="13" name="Рисунок 12">
+            <a:extLst>
+              <a:ext uri="{FF2B5EF4-FFF2-40B4-BE49-F238E27FC236}">
+                <a16:creationId xmlns:a16="http://schemas.microsoft.com/office/drawing/2014/main" id="{81D96C90-BDC7-4164-9B04-EB1433405131}"/>
+              </a:ext>
+            </a:extLst>
+          </p:cNvPr>
+          <p:cNvPicPr>
+            <a:picLocks noChangeAspect="1"/>
+          </p:cNvPicPr>
+          <p:nvPr/>
+        </p:nvPicPr>
+        <p:blipFill>
+          <a:blip r:embed="rId6">
+            <a:extLst>
+              <a:ext uri="{28A0092B-C50C-407E-A947-70E740481C1C}">
+                <a14:useLocalDpi xmlns:a14="http://schemas.microsoft.com/office/drawing/2010/main" val="0"/>
+              </a:ext>
+            </a:extLst>
+          </a:blip>
+          <a:stretch>
+            <a:fillRect/>
+          </a:stretch>
+        </p:blipFill>
+        <p:spPr>
+          <a:xfrm>
+            <a:off x="2862014" y="4629734"/>
+            <a:ext cx="1368066" cy="1368066"/>
+          </a:xfrm>
+          <a:prstGeom prst="rect">
+            <a:avLst/>
+          </a:prstGeom>
+        </p:spPr>
+      </p:pic>
+      <p:pic>
+        <p:nvPicPr>
+          <p:cNvPr id="15" name="Рисунок 14">
+            <a:extLst>
+              <a:ext uri="{FF2B5EF4-FFF2-40B4-BE49-F238E27FC236}">
+                <a16:creationId xmlns:a16="http://schemas.microsoft.com/office/drawing/2014/main" id="{D879B511-FA9C-4F4A-B376-FCD832BB1EC3}"/>
+              </a:ext>
+            </a:extLst>
+          </p:cNvPr>
+          <p:cNvPicPr>
+            <a:picLocks noChangeAspect="1"/>
+          </p:cNvPicPr>
+          <p:nvPr/>
+        </p:nvPicPr>
+        <p:blipFill>
+          <a:blip r:embed="rId7">
+            <a:extLst>
+              <a:ext uri="{28A0092B-C50C-407E-A947-70E740481C1C}">
+                <a14:useLocalDpi xmlns:a14="http://schemas.microsoft.com/office/drawing/2010/main" val="0"/>
+              </a:ext>
+            </a:extLst>
+          </a:blip>
+          <a:stretch>
+            <a:fillRect/>
+          </a:stretch>
+        </p:blipFill>
+        <p:spPr>
+          <a:xfrm>
+            <a:off x="8982434" y="2631952"/>
+            <a:ext cx="1368066" cy="1368066"/>
+          </a:xfrm>
+          <a:prstGeom prst="rect">
+            <a:avLst/>
+          </a:prstGeom>
+        </p:spPr>
+      </p:pic>
+    </p:spTree>
+    <p:extLst>
+      <p:ext uri="{BB962C8B-B14F-4D97-AF65-F5344CB8AC3E}">
+        <p14:creationId xmlns:p14="http://schemas.microsoft.com/office/powerpoint/2010/main" val="4190373195"/>
+      </p:ext>
+    </p:extLst>
+  </p:cSld>
+  <p:clrMapOvr>
+    <a:masterClrMapping/>
+  </p:clrMapOvr>
+</p:sld>
+</file>
+
+<file path=ppt/slides/slide5.xml><?xml version="1.0" encoding="utf-8"?>
+<p:sld xmlns:a="http://schemas.openxmlformats.org/drawingml/2006/main" xmlns:r="http://schemas.openxmlformats.org/officeDocument/2006/relationships" xmlns:p="http://schemas.openxmlformats.org/presentationml/2006/main">
+  <p:cSld>
+    <p:spTree>
+      <p:nvGrpSpPr>
+        <p:cNvPr id="1" name=""/>
+        <p:cNvGrpSpPr/>
+        <p:nvPr/>
+      </p:nvGrpSpPr>
+      <p:grpSpPr>
+        <a:xfrm>
+          <a:off x="0" y="0"/>
+          <a:ext cx="0" cy="0"/>
+          <a:chOff x="0" y="0"/>
+          <a:chExt cx="0" cy="0"/>
+        </a:xfrm>
+      </p:grpSpPr>
+      <p:sp>
+        <p:nvSpPr>
+          <p:cNvPr id="2" name="Заголовок 1">
+            <a:extLst>
+              <a:ext uri="{FF2B5EF4-FFF2-40B4-BE49-F238E27FC236}">
+                <a16:creationId xmlns:a16="http://schemas.microsoft.com/office/drawing/2014/main" id="{B8BF5641-8E16-4220-BABE-249F5274F6CA}"/>
+              </a:ext>
+            </a:extLst>
+          </p:cNvPr>
+          <p:cNvSpPr>
+            <a:spLocks noGrp="1"/>
+          </p:cNvSpPr>
+          <p:nvPr>
+            <p:ph type="title"/>
+          </p:nvPr>
+        </p:nvSpPr>
+        <p:spPr>
+          <a:xfrm>
+            <a:off x="787109" y="234892"/>
+            <a:ext cx="10515600" cy="939567"/>
+          </a:xfrm>
+        </p:spPr>
+        <p:txBody>
+          <a:bodyPr/>
+          <a:lstStyle/>
+          <a:p>
+            <a:r>
+              <a:rPr lang="ru-RU" dirty="0">
+                <a:latin typeface="Times New Roman" panose="02020603050405020304" pitchFamily="18" charset="0"/>
+                <a:cs typeface="Times New Roman" panose="02020603050405020304" pitchFamily="18" charset="0"/>
+              </a:rPr>
+              <a:t>Разработка веб-приложения</a:t>
+            </a:r>
+          </a:p>
+        </p:txBody>
+      </p:sp>
+      <p:sp>
+        <p:nvSpPr>
+          <p:cNvPr id="3" name="Текст 2">
+            <a:extLst>
+              <a:ext uri="{FF2B5EF4-FFF2-40B4-BE49-F238E27FC236}">
+                <a16:creationId xmlns:a16="http://schemas.microsoft.com/office/drawing/2014/main" id="{B9FC10D3-6877-4C4E-9C5E-3A603695325D}"/>
+              </a:ext>
+            </a:extLst>
+          </p:cNvPr>
+          <p:cNvSpPr>
+            <a:spLocks noGrp="1"/>
+          </p:cNvSpPr>
+          <p:nvPr>
+            <p:ph type="body" idx="1"/>
+          </p:nvPr>
+        </p:nvSpPr>
+        <p:spPr/>
+        <p:txBody>
+          <a:bodyPr/>
+          <a:lstStyle/>
+          <a:p>
+            <a:r>
+              <a:rPr lang="ru-RU" dirty="0"/>
+              <a:t>Скрин из </a:t>
+            </a:r>
+            <a:r>
+              <a:rPr lang="ru-RU" dirty="0" err="1"/>
+              <a:t>пг</a:t>
+            </a:r>
+            <a:r>
+              <a:rPr lang="ru-RU" dirty="0"/>
+              <a:t> админа </a:t>
+            </a:r>
+          </a:p>
+        </p:txBody>
+      </p:sp>
+    </p:spTree>
+    <p:extLst>
+      <p:ext uri="{BB962C8B-B14F-4D97-AF65-F5344CB8AC3E}">
+        <p14:creationId xmlns:p14="http://schemas.microsoft.com/office/powerpoint/2010/main" val="3872834071"/>
+      </p:ext>
+    </p:extLst>
+  </p:cSld>
+  <p:clrMapOvr>
+    <a:masterClrMapping/>
+  </p:clrMapOvr>
+</p:sld>
+</file>
+
+<file path=ppt/slides/slide6.xml><?xml version="1.0" encoding="utf-8"?>
+<p:sld xmlns:a="http://schemas.openxmlformats.org/drawingml/2006/main" xmlns:r="http://schemas.openxmlformats.org/officeDocument/2006/relationships" xmlns:p="http://schemas.openxmlformats.org/presentationml/2006/main">
+  <p:cSld>
+    <p:spTree>
+      <p:nvGrpSpPr>
+        <p:cNvPr id="1" name=""/>
+        <p:cNvGrpSpPr/>
+        <p:nvPr/>
+      </p:nvGrpSpPr>
+      <p:grpSpPr>
+        <a:xfrm>
+          <a:off x="0" y="0"/>
+          <a:ext cx="0" cy="0"/>
+          <a:chOff x="0" y="0"/>
+          <a:chExt cx="0" cy="0"/>
+        </a:xfrm>
+      </p:grpSpPr>
+      <p:sp>
+        <p:nvSpPr>
+          <p:cNvPr id="2" name="Заголовок 1">
+            <a:extLst>
+              <a:ext uri="{FF2B5EF4-FFF2-40B4-BE49-F238E27FC236}">
+                <a16:creationId xmlns:a16="http://schemas.microsoft.com/office/drawing/2014/main" id="{B8BF5641-8E16-4220-BABE-249F5274F6CA}"/>
+              </a:ext>
+            </a:extLst>
+          </p:cNvPr>
+          <p:cNvSpPr>
+            <a:spLocks noGrp="1"/>
+          </p:cNvSpPr>
+          <p:nvPr>
+            <p:ph type="title"/>
+          </p:nvPr>
+        </p:nvSpPr>
+        <p:spPr>
+          <a:xfrm>
+            <a:off x="787109" y="234892"/>
+            <a:ext cx="10515600" cy="939567"/>
+          </a:xfrm>
+        </p:spPr>
+        <p:txBody>
+          <a:bodyPr/>
+          <a:lstStyle/>
+          <a:p>
+            <a:r>
+              <a:rPr lang="ru-RU" dirty="0">
+                <a:latin typeface="Times New Roman" panose="02020603050405020304" pitchFamily="18" charset="0"/>
+                <a:cs typeface="Times New Roman" panose="02020603050405020304" pitchFamily="18" charset="0"/>
+              </a:rPr>
+              <a:t>Разработка веб-приложения</a:t>
+            </a:r>
+          </a:p>
+        </p:txBody>
+      </p:sp>
+      <p:sp>
+        <p:nvSpPr>
+          <p:cNvPr id="3" name="Текст 2">
+            <a:extLst>
+              <a:ext uri="{FF2B5EF4-FFF2-40B4-BE49-F238E27FC236}">
+                <a16:creationId xmlns:a16="http://schemas.microsoft.com/office/drawing/2014/main" id="{B9FC10D3-6877-4C4E-9C5E-3A603695325D}"/>
+              </a:ext>
+            </a:extLst>
+          </p:cNvPr>
+          <p:cNvSpPr>
+            <a:spLocks noGrp="1"/>
+          </p:cNvSpPr>
+          <p:nvPr>
+            <p:ph type="body" idx="1"/>
+          </p:nvPr>
+        </p:nvSpPr>
+        <p:spPr/>
+        <p:txBody>
+          <a:bodyPr>
+            <a:normAutofit/>
+          </a:bodyPr>
+          <a:lstStyle/>
+          <a:p>
+            <a:r>
+              <a:rPr lang="ru-RU" sz="1000" dirty="0">
+                <a:solidFill>
+                  <a:schemeClr val="bg1"/>
+                </a:solidFill>
+              </a:rPr>
+              <a:t>.</a:t>
+            </a:r>
+          </a:p>
+        </p:txBody>
+      </p:sp>
+      <p:pic>
+        <p:nvPicPr>
+          <p:cNvPr id="4" name="Рисунок 3">
+            <a:extLst>
+              <a:ext uri="{FF2B5EF4-FFF2-40B4-BE49-F238E27FC236}">
+                <a16:creationId xmlns:a16="http://schemas.microsoft.com/office/drawing/2014/main" id="{72386221-8359-4872-83B4-8324F9212017}"/>
+              </a:ext>
+            </a:extLst>
+          </p:cNvPr>
+          <p:cNvPicPr>
+            <a:picLocks noChangeAspect="1"/>
+          </p:cNvPicPr>
+          <p:nvPr/>
+        </p:nvPicPr>
+        <p:blipFill rotWithShape="1">
+          <a:blip r:embed="rId2"/>
+          <a:srcRect l="19541" t="32416" r="48830" b="21713"/>
+          <a:stretch/>
+        </p:blipFill>
+        <p:spPr>
+          <a:xfrm>
+            <a:off x="3275144" y="1174459"/>
+            <a:ext cx="5629012" cy="4592198"/>
+          </a:xfrm>
+          <a:prstGeom prst="rect">
+            <a:avLst/>
+          </a:prstGeom>
+        </p:spPr>
+      </p:pic>
+      <p:sp>
+        <p:nvSpPr>
+          <p:cNvPr id="5" name="TextBox 4">
+            <a:extLst>
+              <a:ext uri="{FF2B5EF4-FFF2-40B4-BE49-F238E27FC236}">
+                <a16:creationId xmlns:a16="http://schemas.microsoft.com/office/drawing/2014/main" id="{39EC7E52-3A2E-41B9-81F1-2E9760FAD4B7}"/>
+              </a:ext>
+            </a:extLst>
+          </p:cNvPr>
+          <p:cNvSpPr txBox="1"/>
+          <p:nvPr/>
+        </p:nvSpPr>
+        <p:spPr>
+          <a:xfrm>
+            <a:off x="2924175" y="5720318"/>
+            <a:ext cx="6715125" cy="369332"/>
+          </a:xfrm>
+          <a:prstGeom prst="rect">
+            <a:avLst/>
+          </a:prstGeom>
+          <a:noFill/>
+        </p:spPr>
+        <p:txBody>
+          <a:bodyPr wrap="square" rtlCol="0">
+            <a:spAutoFit/>
+          </a:bodyPr>
+          <a:lstStyle/>
+          <a:p>
+            <a:r>
+              <a:rPr lang="ru-RU" dirty="0">
+                <a:latin typeface="Times New Roman" panose="02020603050405020304" pitchFamily="18" charset="0"/>
+                <a:cs typeface="Times New Roman" panose="02020603050405020304" pitchFamily="18" charset="0"/>
+              </a:rPr>
+              <a:t>Код сервиса, отвечающего за пользовательские бизнес-процессы</a:t>
+            </a:r>
+          </a:p>
+        </p:txBody>
+      </p:sp>
+    </p:spTree>
+    <p:extLst>
+      <p:ext uri="{BB962C8B-B14F-4D97-AF65-F5344CB8AC3E}">
+        <p14:creationId xmlns:p14="http://schemas.microsoft.com/office/powerpoint/2010/main" val="154970433"/>
+      </p:ext>
+    </p:extLst>
+  </p:cSld>
+  <p:clrMapOvr>
+    <a:masterClrMapping/>
+  </p:clrMapOvr>
+</p:sld>
+</file>
+
+<file path=ppt/slides/slide7.xml><?xml version="1.0" encoding="utf-8"?>
+<p:sld xmlns:a="http://schemas.openxmlformats.org/drawingml/2006/main" xmlns:r="http://schemas.openxmlformats.org/officeDocument/2006/relationships" xmlns:p="http://schemas.openxmlformats.org/presentationml/2006/main">
+  <p:cSld>
+    <p:spTree>
+      <p:nvGrpSpPr>
+        <p:cNvPr id="1" name=""/>
+        <p:cNvGrpSpPr/>
+        <p:nvPr/>
+      </p:nvGrpSpPr>
+      <p:grpSpPr>
+        <a:xfrm>
+          <a:off x="0" y="0"/>
+          <a:ext cx="0" cy="0"/>
+          <a:chOff x="0" y="0"/>
+          <a:chExt cx="0" cy="0"/>
+        </a:xfrm>
+      </p:grpSpPr>
+      <p:sp>
+        <p:nvSpPr>
+          <p:cNvPr id="2" name="Заголовок 1">
+            <a:extLst>
+              <a:ext uri="{FF2B5EF4-FFF2-40B4-BE49-F238E27FC236}">
+                <a16:creationId xmlns:a16="http://schemas.microsoft.com/office/drawing/2014/main" id="{B8BF5641-8E16-4220-BABE-249F5274F6CA}"/>
+              </a:ext>
+            </a:extLst>
+          </p:cNvPr>
+          <p:cNvSpPr>
+            <a:spLocks noGrp="1"/>
+          </p:cNvSpPr>
+          <p:nvPr>
+            <p:ph type="title"/>
+          </p:nvPr>
+        </p:nvSpPr>
+        <p:spPr>
+          <a:xfrm>
+            <a:off x="787109" y="234892"/>
+            <a:ext cx="10515600" cy="939567"/>
+          </a:xfrm>
+        </p:spPr>
+        <p:txBody>
+          <a:bodyPr/>
+          <a:lstStyle/>
+          <a:p>
+            <a:r>
+              <a:rPr lang="ru-RU" dirty="0">
+                <a:latin typeface="Times New Roman" panose="02020603050405020304" pitchFamily="18" charset="0"/>
+                <a:cs typeface="Times New Roman" panose="02020603050405020304" pitchFamily="18" charset="0"/>
+              </a:rPr>
+              <a:t>Разработка веб-приложения</a:t>
+            </a:r>
+          </a:p>
+        </p:txBody>
+      </p:sp>
+      <p:sp>
+        <p:nvSpPr>
+          <p:cNvPr id="3" name="Текст 2">
+            <a:extLst>
+              <a:ext uri="{FF2B5EF4-FFF2-40B4-BE49-F238E27FC236}">
+                <a16:creationId xmlns:a16="http://schemas.microsoft.com/office/drawing/2014/main" id="{B9FC10D3-6877-4C4E-9C5E-3A603695325D}"/>
+              </a:ext>
+            </a:extLst>
+          </p:cNvPr>
+          <p:cNvSpPr>
+            <a:spLocks noGrp="1"/>
+          </p:cNvSpPr>
+          <p:nvPr>
+            <p:ph type="body" idx="1"/>
+          </p:nvPr>
+        </p:nvSpPr>
+        <p:spPr/>
+        <p:txBody>
+          <a:bodyPr>
+            <a:normAutofit/>
+          </a:bodyPr>
+          <a:lstStyle/>
+          <a:p>
+            <a:r>
+              <a:rPr lang="ru-RU" sz="1000" dirty="0">
+                <a:solidFill>
+                  <a:schemeClr val="bg1"/>
+                </a:solidFill>
+              </a:rPr>
+              <a:t>.</a:t>
+            </a:r>
+          </a:p>
+        </p:txBody>
+      </p:sp>
+      <p:pic>
+        <p:nvPicPr>
+          <p:cNvPr id="5" name="Рисунок 4">
+            <a:extLst>
+              <a:ext uri="{FF2B5EF4-FFF2-40B4-BE49-F238E27FC236}">
+                <a16:creationId xmlns:a16="http://schemas.microsoft.com/office/drawing/2014/main" id="{C1D5C617-CD96-4062-AC9A-8F55F69BDB1B}"/>
+              </a:ext>
+            </a:extLst>
+          </p:cNvPr>
+          <p:cNvPicPr>
+            <a:picLocks noChangeAspect="1"/>
+          </p:cNvPicPr>
+          <p:nvPr/>
+        </p:nvPicPr>
+        <p:blipFill rotWithShape="1">
+          <a:blip r:embed="rId2"/>
+          <a:srcRect l="19748" t="32293" r="50000" b="25015"/>
+          <a:stretch/>
+        </p:blipFill>
+        <p:spPr>
+          <a:xfrm>
+            <a:off x="3171679" y="1174459"/>
+            <a:ext cx="6039433" cy="4793998"/>
+          </a:xfrm>
+          <a:prstGeom prst="rect">
+            <a:avLst/>
+          </a:prstGeom>
+        </p:spPr>
+      </p:pic>
+      <p:sp>
+        <p:nvSpPr>
+          <p:cNvPr id="8" name="TextBox 7">
+            <a:extLst>
+              <a:ext uri="{FF2B5EF4-FFF2-40B4-BE49-F238E27FC236}">
+                <a16:creationId xmlns:a16="http://schemas.microsoft.com/office/drawing/2014/main" id="{B1420F1E-CB20-4E9E-A5FF-268DA063FF9D}"/>
+              </a:ext>
+            </a:extLst>
+          </p:cNvPr>
+          <p:cNvSpPr txBox="1"/>
+          <p:nvPr/>
+        </p:nvSpPr>
+        <p:spPr>
+          <a:xfrm>
+            <a:off x="3829050" y="5968457"/>
+            <a:ext cx="5856504" cy="369332"/>
+          </a:xfrm>
+          <a:prstGeom prst="rect">
+            <a:avLst/>
+          </a:prstGeom>
+          <a:noFill/>
+        </p:spPr>
+        <p:txBody>
+          <a:bodyPr wrap="square" rtlCol="0">
+            <a:spAutoFit/>
+          </a:bodyPr>
+          <a:lstStyle/>
+          <a:p>
+            <a:r>
+              <a:rPr lang="ru-RU" dirty="0">
+                <a:latin typeface="Times New Roman" panose="02020603050405020304" pitchFamily="18" charset="0"/>
+                <a:cs typeface="Times New Roman" panose="02020603050405020304" pitchFamily="18" charset="0"/>
+              </a:rPr>
+              <a:t>Код обработчика клиентских запросов на сервер</a:t>
+            </a:r>
+          </a:p>
+        </p:txBody>
+      </p:sp>
+    </p:spTree>
+    <p:extLst>
+      <p:ext uri="{BB962C8B-B14F-4D97-AF65-F5344CB8AC3E}">
+        <p14:creationId xmlns:p14="http://schemas.microsoft.com/office/powerpoint/2010/main" val="2708462613"/>
+      </p:ext>
+    </p:extLst>
+  </p:cSld>
+  <p:clrMapOvr>
+    <a:masterClrMapping/>
+  </p:clrMapOvr>
+</p:sld>
+</file>
+
+<file path=ppt/slides/slide8.xml><?xml version="1.0" encoding="utf-8"?>
+<p:sld xmlns:a="http://schemas.openxmlformats.org/drawingml/2006/main" xmlns:r="http://schemas.openxmlformats.org/officeDocument/2006/relationships" xmlns:p="http://schemas.openxmlformats.org/presentationml/2006/main">
+  <p:cSld>
+    <p:spTree>
+      <p:nvGrpSpPr>
+        <p:cNvPr id="1" name=""/>
+        <p:cNvGrpSpPr/>
+        <p:nvPr/>
+      </p:nvGrpSpPr>
+      <p:grpSpPr>
+        <a:xfrm>
+          <a:off x="0" y="0"/>
+          <a:ext cx="0" cy="0"/>
+          <a:chOff x="0" y="0"/>
+          <a:chExt cx="0" cy="0"/>
+        </a:xfrm>
+      </p:grpSpPr>
+      <p:sp>
+        <p:nvSpPr>
+          <p:cNvPr id="2" name="Заголовок 1">
+            <a:extLst>
+              <a:ext uri="{FF2B5EF4-FFF2-40B4-BE49-F238E27FC236}">
+                <a16:creationId xmlns:a16="http://schemas.microsoft.com/office/drawing/2014/main" id="{B8BF5641-8E16-4220-BABE-249F5274F6CA}"/>
+              </a:ext>
+            </a:extLst>
+          </p:cNvPr>
+          <p:cNvSpPr>
+            <a:spLocks noGrp="1"/>
+          </p:cNvSpPr>
+          <p:nvPr>
+            <p:ph type="title"/>
+          </p:nvPr>
+        </p:nvSpPr>
+        <p:spPr>
+          <a:xfrm>
+            <a:off x="787109" y="234892"/>
+            <a:ext cx="10515600" cy="939567"/>
+          </a:xfrm>
+        </p:spPr>
+        <p:txBody>
+          <a:bodyPr/>
+          <a:lstStyle/>
+          <a:p>
+            <a:r>
+              <a:rPr lang="ru-RU" dirty="0">
+                <a:latin typeface="Times New Roman" panose="02020603050405020304" pitchFamily="18" charset="0"/>
+                <a:cs typeface="Times New Roman" panose="02020603050405020304" pitchFamily="18" charset="0"/>
+              </a:rPr>
+              <a:t>Разработка веб-приложения</a:t>
+            </a:r>
+          </a:p>
+        </p:txBody>
+      </p:sp>
+      <p:sp>
+        <p:nvSpPr>
+          <p:cNvPr id="3" name="Текст 2">
+            <a:extLst>
+              <a:ext uri="{FF2B5EF4-FFF2-40B4-BE49-F238E27FC236}">
+                <a16:creationId xmlns:a16="http://schemas.microsoft.com/office/drawing/2014/main" id="{B9FC10D3-6877-4C4E-9C5E-3A603695325D}"/>
+              </a:ext>
+            </a:extLst>
+          </p:cNvPr>
+          <p:cNvSpPr>
+            <a:spLocks noGrp="1"/>
+          </p:cNvSpPr>
+          <p:nvPr>
+            <p:ph type="body" idx="1"/>
+          </p:nvPr>
+        </p:nvSpPr>
+        <p:spPr/>
+        <p:txBody>
+          <a:bodyPr>
+            <a:normAutofit/>
+          </a:bodyPr>
+          <a:lstStyle/>
+          <a:p>
+            <a:r>
+              <a:rPr lang="ru-RU" sz="1000" dirty="0">
+                <a:solidFill>
+                  <a:schemeClr val="bg1"/>
+                </a:solidFill>
+              </a:rPr>
+              <a:t>.</a:t>
+            </a:r>
+          </a:p>
+        </p:txBody>
+      </p:sp>
+      <p:pic>
+        <p:nvPicPr>
+          <p:cNvPr id="4" name="Рисунок 3">
+            <a:extLst>
+              <a:ext uri="{FF2B5EF4-FFF2-40B4-BE49-F238E27FC236}">
+                <a16:creationId xmlns:a16="http://schemas.microsoft.com/office/drawing/2014/main" id="{C161304F-F2B7-409D-B6DF-BF6436FAD898}"/>
+              </a:ext>
+            </a:extLst>
+          </p:cNvPr>
+          <p:cNvPicPr>
+            <a:picLocks noChangeAspect="1"/>
+          </p:cNvPicPr>
+          <p:nvPr/>
+        </p:nvPicPr>
+        <p:blipFill rotWithShape="1">
+          <a:blip r:embed="rId2"/>
+          <a:srcRect l="16307" t="33079" r="50000" b="18410"/>
+          <a:stretch/>
+        </p:blipFill>
+        <p:spPr>
+          <a:xfrm>
+            <a:off x="3036814" y="1174459"/>
+            <a:ext cx="6241409" cy="5054925"/>
+          </a:xfrm>
+          <a:prstGeom prst="rect">
+            <a:avLst/>
+          </a:prstGeom>
+        </p:spPr>
+      </p:pic>
+      <p:sp>
+        <p:nvSpPr>
+          <p:cNvPr id="6" name="TextBox 5">
+            <a:extLst>
+              <a:ext uri="{FF2B5EF4-FFF2-40B4-BE49-F238E27FC236}">
+                <a16:creationId xmlns:a16="http://schemas.microsoft.com/office/drawing/2014/main" id="{9DA8DC31-5358-45D3-AF25-C4B52720B448}"/>
+              </a:ext>
+            </a:extLst>
+          </p:cNvPr>
+          <p:cNvSpPr txBox="1"/>
+          <p:nvPr/>
+        </p:nvSpPr>
+        <p:spPr>
+          <a:xfrm>
+            <a:off x="3448050" y="6229384"/>
+            <a:ext cx="6752575" cy="369332"/>
+          </a:xfrm>
+          <a:prstGeom prst="rect">
+            <a:avLst/>
+          </a:prstGeom>
+          <a:noFill/>
+        </p:spPr>
+        <p:txBody>
+          <a:bodyPr wrap="square" rtlCol="0">
+            <a:spAutoFit/>
+          </a:bodyPr>
+          <a:lstStyle/>
+          <a:p>
+            <a:r>
+              <a:rPr lang="ru-RU" dirty="0">
+                <a:latin typeface="Times New Roman" panose="02020603050405020304" pitchFamily="18" charset="0"/>
+                <a:cs typeface="Times New Roman" panose="02020603050405020304" pitchFamily="18" charset="0"/>
+              </a:rPr>
+              <a:t>Код, обрабатывающий задачу отправки письма на фоне</a:t>
+            </a:r>
+          </a:p>
+        </p:txBody>
+      </p:sp>
+    </p:spTree>
+    <p:extLst>
+      <p:ext uri="{BB962C8B-B14F-4D97-AF65-F5344CB8AC3E}">
+        <p14:creationId xmlns:p14="http://schemas.microsoft.com/office/powerpoint/2010/main" val="1502580758"/>
+      </p:ext>
+    </p:extLst>
+  </p:cSld>
+  <p:clrMapOvr>
+    <a:masterClrMapping/>
+  </p:clrMapOvr>
+</p:sld>
+</file>
+
+<file path=ppt/slides/slide9.xml><?xml version="1.0" encoding="utf-8"?>
+<p:sld xmlns:a="http://schemas.openxmlformats.org/drawingml/2006/main" xmlns:r="http://schemas.openxmlformats.org/officeDocument/2006/relationships" xmlns:p="http://schemas.openxmlformats.org/presentationml/2006/main">
+  <p:cSld>
+    <p:spTree>
+      <p:nvGrpSpPr>
+        <p:cNvPr id="1" name=""/>
+        <p:cNvGrpSpPr/>
+        <p:nvPr/>
+      </p:nvGrpSpPr>
+      <p:grpSpPr>
+        <a:xfrm>
+          <a:off x="0" y="0"/>
+          <a:ext cx="0" cy="0"/>
+          <a:chOff x="0" y="0"/>
+          <a:chExt cx="0" cy="0"/>
+        </a:xfrm>
+      </p:grpSpPr>
+      <p:sp>
+        <p:nvSpPr>
+          <p:cNvPr id="2" name="Заголовок 1">
+            <a:extLst>
+              <a:ext uri="{FF2B5EF4-FFF2-40B4-BE49-F238E27FC236}">
+                <a16:creationId xmlns:a16="http://schemas.microsoft.com/office/drawing/2014/main" id="{B8BF5641-8E16-4220-BABE-249F5274F6CA}"/>
+              </a:ext>
+            </a:extLst>
+          </p:cNvPr>
+          <p:cNvSpPr>
+            <a:spLocks noGrp="1"/>
+          </p:cNvSpPr>
+          <p:nvPr>
+            <p:ph type="title"/>
+          </p:nvPr>
+        </p:nvSpPr>
+        <p:spPr>
+          <a:xfrm>
+            <a:off x="787109" y="234892"/>
+            <a:ext cx="10515600" cy="939567"/>
+          </a:xfrm>
+        </p:spPr>
+        <p:txBody>
+          <a:bodyPr/>
+          <a:lstStyle/>
+          <a:p>
+            <a:r>
+              <a:rPr lang="ru-RU" dirty="0">
+                <a:latin typeface="Times New Roman" panose="02020603050405020304" pitchFamily="18" charset="0"/>
+                <a:cs typeface="Times New Roman" panose="02020603050405020304" pitchFamily="18" charset="0"/>
+              </a:rPr>
+              <a:t>Разработка веб-приложения</a:t>
+            </a:r>
+          </a:p>
+        </p:txBody>
+      </p:sp>
+      <p:sp>
+        <p:nvSpPr>
+          <p:cNvPr id="3" name="Текст 2">
+            <a:extLst>
+              <a:ext uri="{FF2B5EF4-FFF2-40B4-BE49-F238E27FC236}">
+                <a16:creationId xmlns:a16="http://schemas.microsoft.com/office/drawing/2014/main" id="{B9FC10D3-6877-4C4E-9C5E-3A603695325D}"/>
+              </a:ext>
+            </a:extLst>
+          </p:cNvPr>
+          <p:cNvSpPr>
+            <a:spLocks noGrp="1"/>
+          </p:cNvSpPr>
+          <p:nvPr>
+            <p:ph type="body" idx="1"/>
+          </p:nvPr>
+        </p:nvSpPr>
+        <p:spPr/>
+        <p:txBody>
+          <a:bodyPr>
+            <a:normAutofit/>
+          </a:bodyPr>
+          <a:lstStyle/>
+          <a:p>
+            <a:r>
+              <a:rPr lang="ru-RU" sz="1000" dirty="0">
+                <a:solidFill>
+                  <a:schemeClr val="bg1"/>
+                </a:solidFill>
+              </a:rPr>
+              <a:t>.</a:t>
+            </a:r>
+          </a:p>
+        </p:txBody>
+      </p:sp>
+      <p:pic>
+        <p:nvPicPr>
+          <p:cNvPr id="5" name="Рисунок 4">
+            <a:extLst>
+              <a:ext uri="{FF2B5EF4-FFF2-40B4-BE49-F238E27FC236}">
+                <a16:creationId xmlns:a16="http://schemas.microsoft.com/office/drawing/2014/main" id="{F55A27C1-2E5A-4533-9C76-7AB9614F0E32}"/>
+              </a:ext>
+            </a:extLst>
+          </p:cNvPr>
+          <p:cNvPicPr>
+            <a:picLocks noChangeAspect="1"/>
+          </p:cNvPicPr>
+          <p:nvPr/>
+        </p:nvPicPr>
+        <p:blipFill rotWithShape="1">
+          <a:blip r:embed="rId2"/>
+          <a:srcRect l="16376" t="33079" r="50000" b="27217"/>
+          <a:stretch/>
+        </p:blipFill>
+        <p:spPr>
+          <a:xfrm>
+            <a:off x="2558205" y="1437269"/>
+            <a:ext cx="7062889" cy="4691308"/>
+          </a:xfrm>
+          <a:prstGeom prst="rect">
+            <a:avLst/>
+          </a:prstGeom>
+        </p:spPr>
+      </p:pic>
+      <p:sp>
+        <p:nvSpPr>
+          <p:cNvPr id="6" name="TextBox 5">
+            <a:extLst>
+              <a:ext uri="{FF2B5EF4-FFF2-40B4-BE49-F238E27FC236}">
+                <a16:creationId xmlns:a16="http://schemas.microsoft.com/office/drawing/2014/main" id="{7125FA0E-2A0F-4914-8E92-092EFB457B56}"/>
+              </a:ext>
+            </a:extLst>
+          </p:cNvPr>
+          <p:cNvSpPr txBox="1"/>
+          <p:nvPr/>
+        </p:nvSpPr>
+        <p:spPr>
+          <a:xfrm>
+            <a:off x="2333625" y="6115050"/>
+            <a:ext cx="7718203" cy="369332"/>
+          </a:xfrm>
+          <a:prstGeom prst="rect">
+            <a:avLst/>
+          </a:prstGeom>
+          <a:noFill/>
+        </p:spPr>
+        <p:txBody>
+          <a:bodyPr wrap="none" rtlCol="0">
+            <a:spAutoFit/>
+          </a:bodyPr>
+          <a:lstStyle/>
+          <a:p>
+            <a:r>
+              <a:rPr lang="ru-RU" dirty="0">
+                <a:latin typeface="Times New Roman" panose="02020603050405020304" pitchFamily="18" charset="0"/>
+                <a:cs typeface="Times New Roman" panose="02020603050405020304" pitchFamily="18" charset="0"/>
+              </a:rPr>
+              <a:t>Код пользовательского сервиса, с которым будет взаимодействовать клиент</a:t>
+            </a:r>
+          </a:p>
+        </p:txBody>
+      </p:sp>
+    </p:spTree>
+    <p:extLst>
+      <p:ext uri="{BB962C8B-B14F-4D97-AF65-F5344CB8AC3E}">
+        <p14:creationId xmlns:p14="http://schemas.microsoft.com/office/powerpoint/2010/main" val="2828498251"/>
       </p:ext>
     </p:extLst>
   </p:cSld>
@@ -4150,4 +6818,299 @@
     </a:ext>
   </a:extLst>
 </a:theme>
+</file>
+
+<file path=ppt/theme/theme2.xml><?xml version="1.0" encoding="utf-8"?>
+<a:theme xmlns:a="http://schemas.openxmlformats.org/drawingml/2006/main" name="Тема Office">
+  <a:themeElements>
+    <a:clrScheme name="Стандартная">
+      <a:dk1>
+        <a:sysClr val="windowText" lastClr="000000"/>
+      </a:dk1>
+      <a:lt1>
+        <a:sysClr val="window" lastClr="FFFFFF"/>
+      </a:lt1>
+      <a:dk2>
+        <a:srgbClr val="44546A"/>
+      </a:dk2>
+      <a:lt2>
+        <a:srgbClr val="E7E6E6"/>
+      </a:lt2>
+      <a:accent1>
+        <a:srgbClr val="4472C4"/>
+      </a:accent1>
+      <a:accent2>
+        <a:srgbClr val="ED7D31"/>
+      </a:accent2>
+      <a:accent3>
+        <a:srgbClr val="A5A5A5"/>
+      </a:accent3>
+      <a:accent4>
+        <a:srgbClr val="FFC000"/>
+      </a:accent4>
+      <a:accent5>
+        <a:srgbClr val="5B9BD5"/>
+      </a:accent5>
+      <a:accent6>
+        <a:srgbClr val="70AD47"/>
+      </a:accent6>
+      <a:hlink>
+        <a:srgbClr val="0563C1"/>
+      </a:hlink>
+      <a:folHlink>
+        <a:srgbClr val="954F72"/>
+      </a:folHlink>
+    </a:clrScheme>
+    <a:fontScheme name="Стандартная">
+      <a:majorFont>
+        <a:latin typeface="Calibri Light" panose="020F0302020204030204"/>
+        <a:ea typeface=""/>
+        <a:cs typeface=""/>
+        <a:font script="Jpan" typeface="游ゴシック Light"/>
+        <a:font script="Hang" typeface="맑은 고딕"/>
+        <a:font script="Hans" typeface="等线 Light"/>
+        <a:font script="Hant" typeface="新細明體"/>
+        <a:font script="Arab" typeface="Times New Roman"/>
+        <a:font script="Hebr" typeface="Times New Roman"/>
+        <a:font script="Thai" typeface="Angsana New"/>
+        <a:font script="Ethi" typeface="Nyala"/>
+        <a:font script="Beng" typeface="Vrinda"/>
+        <a:font script="Gujr" typeface="Shruti"/>
+        <a:font script="Khmr" typeface="MoolBoran"/>
+        <a:font script="Knda" typeface="Tunga"/>
+        <a:font script="Guru" typeface="Raavi"/>
+        <a:font script="Cans" typeface="Euphemia"/>
+        <a:font script="Cher" typeface="Plantagenet Cherokee"/>
+        <a:font script="Yiii" typeface="Microsoft Yi Baiti"/>
+        <a:font script="Tibt" typeface="Microsoft Himalaya"/>
+        <a:font script="Thaa" typeface="MV Boli"/>
+        <a:font script="Deva" typeface="Mangal"/>
+        <a:font script="Telu" typeface="Gautami"/>
+        <a:font script="Taml" typeface="Latha"/>
+        <a:font script="Syrc" typeface="Estrangelo Edessa"/>
+        <a:font script="Orya" typeface="Kalinga"/>
+        <a:font script="Mlym" typeface="Kartika"/>
+        <a:font script="Laoo" typeface="DokChampa"/>
+        <a:font script="Sinh" typeface="Iskoola Pota"/>
+        <a:font script="Mong" typeface="Mongolian Baiti"/>
+        <a:font script="Viet" typeface="Times New Roman"/>
+        <a:font script="Uigh" typeface="Microsoft Uighur"/>
+        <a:font script="Geor" typeface="Sylfaen"/>
+        <a:font script="Armn" typeface="Arial"/>
+        <a:font script="Bugi" typeface="Leelawadee UI"/>
+        <a:font script="Bopo" typeface="Microsoft JhengHei"/>
+        <a:font script="Java" typeface="Javanese Text"/>
+        <a:font script="Lisu" typeface="Segoe UI"/>
+        <a:font script="Mymr" typeface="Myanmar Text"/>
+        <a:font script="Nkoo" typeface="Ebrima"/>
+        <a:font script="Olck" typeface="Nirmala UI"/>
+        <a:font script="Osma" typeface="Ebrima"/>
+        <a:font script="Phag" typeface="Phagspa"/>
+        <a:font script="Syrn" typeface="Estrangelo Edessa"/>
+        <a:font script="Syrj" typeface="Estrangelo Edessa"/>
+        <a:font script="Syre" typeface="Estrangelo Edessa"/>
+        <a:font script="Sora" typeface="Nirmala UI"/>
+        <a:font script="Tale" typeface="Microsoft Tai Le"/>
+        <a:font script="Talu" typeface="Microsoft New Tai Lue"/>
+        <a:font script="Tfng" typeface="Ebrima"/>
+      </a:majorFont>
+      <a:minorFont>
+        <a:latin typeface="Calibri" panose="020F0502020204030204"/>
+        <a:ea typeface=""/>
+        <a:cs typeface=""/>
+        <a:font script="Jpan" typeface="游ゴシック"/>
+        <a:font script="Hang" typeface="맑은 고딕"/>
+        <a:font script="Hans" typeface="等线"/>
+        <a:font script="Hant" typeface="新細明體"/>
+        <a:font script="Arab" typeface="Arial"/>
+        <a:font script="Hebr" typeface="Arial"/>
+        <a:font script="Thai" typeface="Cordia New"/>
+        <a:font script="Ethi" typeface="Nyala"/>
+        <a:font script="Beng" typeface="Vrinda"/>
+        <a:font script="Gujr" typeface="Shruti"/>
+        <a:font script="Khmr" typeface="DaunPenh"/>
+        <a:font script="Knda" typeface="Tunga"/>
+        <a:font script="Guru" typeface="Raavi"/>
+        <a:font script="Cans" typeface="Euphemia"/>
+        <a:font script="Cher" typeface="Plantagenet Cherokee"/>
+        <a:font script="Yiii" typeface="Microsoft Yi Baiti"/>
+        <a:font script="Tibt" typeface="Microsoft Himalaya"/>
+        <a:font script="Thaa" typeface="MV Boli"/>
+        <a:font script="Deva" typeface="Mangal"/>
+        <a:font script="Telu" typeface="Gautami"/>
+        <a:font script="Taml" typeface="Latha"/>
+        <a:font script="Syrc" typeface="Estrangelo Edessa"/>
+        <a:font script="Orya" typeface="Kalinga"/>
+        <a:font script="Mlym" typeface="Kartika"/>
+        <a:font script="Laoo" typeface="DokChampa"/>
+        <a:font script="Sinh" typeface="Iskoola Pota"/>
+        <a:font script="Mong" typeface="Mongolian Baiti"/>
+        <a:font script="Viet" typeface="Arial"/>
+        <a:font script="Uigh" typeface="Microsoft Uighur"/>
+        <a:font script="Geor" typeface="Sylfaen"/>
+        <a:font script="Armn" typeface="Arial"/>
+        <a:font script="Bugi" typeface="Leelawadee UI"/>
+        <a:font script="Bopo" typeface="Microsoft JhengHei"/>
+        <a:font script="Java" typeface="Javanese Text"/>
+        <a:font script="Lisu" typeface="Segoe UI"/>
+        <a:font script="Mymr" typeface="Myanmar Text"/>
+        <a:font script="Nkoo" typeface="Ebrima"/>
+        <a:font script="Olck" typeface="Nirmala UI"/>
+        <a:font script="Osma" typeface="Ebrima"/>
+        <a:font script="Phag" typeface="Phagspa"/>
+        <a:font script="Syrn" typeface="Estrangelo Edessa"/>
+        <a:font script="Syrj" typeface="Estrangelo Edessa"/>
+        <a:font script="Syre" typeface="Estrangelo Edessa"/>
+        <a:font script="Sora" typeface="Nirmala UI"/>
+        <a:font script="Tale" typeface="Microsoft Tai Le"/>
+        <a:font script="Talu" typeface="Microsoft New Tai Lue"/>
+        <a:font script="Tfng" typeface="Ebrima"/>
+      </a:minorFont>
+    </a:fontScheme>
+    <a:fmtScheme name="Стандартная">
+      <a:fillStyleLst>
+        <a:solidFill>
+          <a:schemeClr val="phClr"/>
+        </a:solidFill>
+        <a:gradFill rotWithShape="1">
+          <a:gsLst>
+            <a:gs pos="0">
+              <a:schemeClr val="phClr">
+                <a:lumMod val="110000"/>
+                <a:satMod val="105000"/>
+                <a:tint val="67000"/>
+              </a:schemeClr>
+            </a:gs>
+            <a:gs pos="50000">
+              <a:schemeClr val="phClr">
+                <a:lumMod val="105000"/>
+                <a:satMod val="103000"/>
+                <a:tint val="73000"/>
+              </a:schemeClr>
+            </a:gs>
+            <a:gs pos="100000">
+              <a:schemeClr val="phClr">
+                <a:lumMod val="105000"/>
+                <a:satMod val="109000"/>
+                <a:tint val="81000"/>
+              </a:schemeClr>
+            </a:gs>
+          </a:gsLst>
+          <a:lin ang="5400000" scaled="0"/>
+        </a:gradFill>
+        <a:gradFill rotWithShape="1">
+          <a:gsLst>
+            <a:gs pos="0">
+              <a:schemeClr val="phClr">
+                <a:satMod val="103000"/>
+                <a:lumMod val="102000"/>
+                <a:tint val="94000"/>
+              </a:schemeClr>
+            </a:gs>
+            <a:gs pos="50000">
+              <a:schemeClr val="phClr">
+                <a:satMod val="110000"/>
+                <a:lumMod val="100000"/>
+                <a:shade val="100000"/>
+              </a:schemeClr>
+            </a:gs>
+            <a:gs pos="100000">
+              <a:schemeClr val="phClr">
+                <a:lumMod val="99000"/>
+                <a:satMod val="120000"/>
+                <a:shade val="78000"/>
+              </a:schemeClr>
+            </a:gs>
+          </a:gsLst>
+          <a:lin ang="5400000" scaled="0"/>
+        </a:gradFill>
+      </a:fillStyleLst>
+      <a:lnStyleLst>
+        <a:ln w="6350" cap="flat" cmpd="sng" algn="ctr">
+          <a:solidFill>
+            <a:schemeClr val="phClr"/>
+          </a:solidFill>
+          <a:prstDash val="solid"/>
+          <a:miter lim="800000"/>
+        </a:ln>
+        <a:ln w="12700" cap="flat" cmpd="sng" algn="ctr">
+          <a:solidFill>
+            <a:schemeClr val="phClr"/>
+          </a:solidFill>
+          <a:prstDash val="solid"/>
+          <a:miter lim="800000"/>
+        </a:ln>
+        <a:ln w="19050" cap="flat" cmpd="sng" algn="ctr">
+          <a:solidFill>
+            <a:schemeClr val="phClr"/>
+          </a:solidFill>
+          <a:prstDash val="solid"/>
+          <a:miter lim="800000"/>
+        </a:ln>
+      </a:lnStyleLst>
+      <a:effectStyleLst>
+        <a:effectStyle>
+          <a:effectLst/>
+        </a:effectStyle>
+        <a:effectStyle>
+          <a:effectLst/>
+        </a:effectStyle>
+        <a:effectStyle>
+          <a:effectLst>
+            <a:outerShdw blurRad="57150" dist="19050" dir="5400000" algn="ctr" rotWithShape="0">
+              <a:srgbClr val="000000">
+                <a:alpha val="63000"/>
+              </a:srgbClr>
+            </a:outerShdw>
+          </a:effectLst>
+        </a:effectStyle>
+      </a:effectStyleLst>
+      <a:bgFillStyleLst>
+        <a:solidFill>
+          <a:schemeClr val="phClr"/>
+        </a:solidFill>
+        <a:solidFill>
+          <a:schemeClr val="phClr">
+            <a:tint val="95000"/>
+            <a:satMod val="170000"/>
+          </a:schemeClr>
+        </a:solidFill>
+        <a:gradFill rotWithShape="1">
+          <a:gsLst>
+            <a:gs pos="0">
+              <a:schemeClr val="phClr">
+                <a:tint val="93000"/>
+                <a:satMod val="150000"/>
+                <a:shade val="98000"/>
+                <a:lumMod val="102000"/>
+              </a:schemeClr>
+            </a:gs>
+            <a:gs pos="50000">
+              <a:schemeClr val="phClr">
+                <a:tint val="98000"/>
+                <a:satMod val="130000"/>
+                <a:shade val="90000"/>
+                <a:lumMod val="103000"/>
+              </a:schemeClr>
+            </a:gs>
+            <a:gs pos="100000">
+              <a:schemeClr val="phClr">
+                <a:shade val="63000"/>
+                <a:satMod val="120000"/>
+              </a:schemeClr>
+            </a:gs>
+          </a:gsLst>
+          <a:lin ang="5400000" scaled="0"/>
+        </a:gradFill>
+      </a:bgFillStyleLst>
+    </a:fmtScheme>
+  </a:themeElements>
+  <a:objectDefaults/>
+  <a:extraClrSchemeLst/>
+  <a:extLst>
+    <a:ext uri="{05A4C25C-085E-4340-85A3-A5531E510DB2}">
+      <thm15:themeFamily xmlns:thm15="http://schemas.microsoft.com/office/thememl/2012/main" name="Office Theme" id="{62F939B6-93AF-4DB8-9C6B-D6C7DFDC589F}" vid="{4A3C46E8-61CC-4603-A589-7422A47A8E4A}"/>
+    </a:ext>
+  </a:extLst>
+</a:theme>
 </file>